--- a/public/templates/vision-driven.pptx
+++ b/public/templates/vision-driven.pptx
@@ -16,10 +16,9 @@
     <p:sldId id="264" r:id="rId10"/>
     <p:sldId id="265" r:id="rId11"/>
     <p:sldId id="266" r:id="rId12"/>
-    <p:sldId id="267" r:id="rId13"/>
   </p:sldIdLst>
   <p:notesMasterIdLst>
-    <p:notesMasterId r:id="rId14"/>
+    <p:notesMasterId r:id="rId13"/>
   </p:notesMasterIdLst>
   <p:sldSz cx="9144000" cy="5143500"/>
   <p:notesSz cx="5143500" cy="9144000"/>
@@ -601,12 +600,7 @@
           <a:p>
             <a:r>
               <a:rPr lang="en-US" dirty="0"/>
-              <a:t>Instructions for "Go-to-Market" slide:
-Customer acquisition strategy
-Distribution channels
-Growth loops
-Network effects
-Replace this content with your own information.</a:t>
+              <a:t/>
             </a:r>
             <a:endParaRPr lang="en-US" dirty="0"/>
           </a:p>
@@ -694,12 +688,7 @@
           <a:p>
             <a:r>
               <a:rPr lang="en-US" dirty="0"/>
-              <a:t>Instructions for "Team" slide:
-Unique founder-market fit
-Unfair advantages
-Previous successes
-Commitment to the mission
-Replace this content with your own information.</a:t>
+              <a:t/>
             </a:r>
             <a:endParaRPr lang="en-US" dirty="0"/>
           </a:p>
@@ -723,99 +712,6 @@
             <a:fld id="{F7021451-1387-4CA6-816F-3879F97B5CBC}" type="slidenum">
               <a:rPr lang="en-US"/>
               <a:t>11</a:t>
-            </a:fld>
-            <a:endParaRPr lang="en-US"/>
-          </a:p>
-        </p:txBody>
-      </p:sp>
-    </p:spTree>
-    <p:extLst>
-      <p:ext uri="{BB962C8B-B14F-4D97-AF65-F5344CB8AC3E}">
-        <p14:creationId xmlns:p14="http://schemas.microsoft.com/office/powerpoint/2010/main" val="1024086991"/>
-      </p:ext>
-    </p:extLst>
-  </p:cSld>
-  <p:clrMapOvr>
-    <a:masterClrMapping/>
-  </p:clrMapOvr>
-</p:notes>
-</file>
-
-<file path=ppt/notesSlides/notesSlide12.xml><?xml version="1.0" encoding="utf-8"?>
-<p:notes xmlns:a="http://schemas.openxmlformats.org/drawingml/2006/main" xmlns:r="http://schemas.openxmlformats.org/officeDocument/2006/relationships" xmlns:p="http://schemas.openxmlformats.org/presentationml/2006/main">
-  <p:cSld>
-    <p:spTree>
-      <p:nvGrpSpPr>
-        <p:cNvPr id="1" name=""/>
-        <p:cNvGrpSpPr/>
-        <p:nvPr/>
-      </p:nvGrpSpPr>
-      <p:grpSpPr>
-        <a:xfrm>
-          <a:off x="0" y="0"/>
-          <a:ext cx="0" cy="0"/>
-          <a:chOff x="0" y="0"/>
-          <a:chExt cx="0" cy="0"/>
-        </a:xfrm>
-      </p:grpSpPr>
-      <p:sp>
-        <p:nvSpPr>
-          <p:cNvPr id="2" name="Slide Image Placeholder 1"/>
-          <p:cNvSpPr>
-            <a:spLocks noGrp="1" noRot="1" noChangeAspect="1"/>
-          </p:cNvSpPr>
-          <p:nvPr>
-            <p:ph type="sldImg"/>
-          </p:nvPr>
-        </p:nvSpPr>
-        <p:spPr/>
-      </p:sp>
-      <p:sp>
-        <p:nvSpPr>
-          <p:cNvPr id="3" name="Notes Placeholder 2"/>
-          <p:cNvSpPr>
-            <a:spLocks noGrp="1"/>
-          </p:cNvSpPr>
-          <p:nvPr>
-            <p:ph type="body" idx="1"/>
-          </p:nvPr>
-        </p:nvSpPr>
-        <p:spPr/>
-        <p:txBody>
-          <a:bodyPr/>
-          <a:lstStyle/>
-          <a:p>
-            <a:r>
-              <a:rPr lang="en-US" dirty="0"/>
-              <a:t>Instructions for "The Ask" slide:
-Investment ask
-What you'll achieve together
-Timeline to major milestones
-Vision of partnership
-Replace this content with your own information.</a:t>
-            </a:r>
-            <a:endParaRPr lang="en-US" dirty="0"/>
-          </a:p>
-        </p:txBody>
-      </p:sp>
-      <p:sp>
-        <p:nvSpPr>
-          <p:cNvPr id="4" name="Slide Number Placeholder 3"/>
-          <p:cNvSpPr>
-            <a:spLocks noGrp="1"/>
-          </p:cNvSpPr>
-          <p:nvPr>
-            <p:ph type="sldNum" sz="quarter" idx="10"/>
-          </p:nvPr>
-        </p:nvSpPr>
-        <p:spPr/>
-        <p:txBody>
-          <a:bodyPr/>
-          <a:lstStyle/>
-          <a:p>
-            <a:fld id="{F7021451-1387-4CA6-816F-3879F97B5CBC}" type="slidenum">
-              <a:rPr lang="en-US"/>
-              <a:t>12</a:t>
             </a:fld>
             <a:endParaRPr lang="en-US"/>
           </a:p>
@@ -880,11 +776,7 @@
           <a:p>
             <a:r>
               <a:rPr lang="en-US" dirty="0"/>
-              <a:t>Instructions for "Cover Slide" slide:
-Company name
-Bold tagline or mission
-Visually striking image
-Replace this content with your own information.</a:t>
+              <a:t/>
             </a:r>
             <a:endParaRPr lang="en-US" dirty="0"/>
           </a:p>
@@ -972,12 +864,7 @@
           <a:p>
             <a:r>
               <a:rPr lang="en-US" dirty="0"/>
-              <a:t>Instructions for "The Vision" slide:
-Your vision for the world
-What changes when you succeed
-The transformation you enable
-Think 10-20 years out
-Replace this content with your own information.</a:t>
+              <a:t/>
             </a:r>
             <a:endParaRPr lang="en-US" dirty="0"/>
           </a:p>
@@ -1065,11 +952,7 @@
           <a:p>
             <a:r>
               <a:rPr lang="en-US" dirty="0"/>
-              <a:t>Instructions for "The Problem" slide:
-What's broken today
-Why current solutions fail
-Urgency of the problem
-Replace this content with your own information.</a:t>
+              <a:t/>
             </a:r>
             <a:endParaRPr lang="en-US" dirty="0"/>
           </a:p>
@@ -1157,12 +1040,7 @@
           <a:p>
             <a:r>
               <a:rPr lang="en-US" dirty="0"/>
-              <a:t>Instructions for "Why Now" slide:
-Technology enablers
-Market shifts
-Regulatory changes
-Consumer behavior trends
-Replace this content with your own information.</a:t>
+              <a:t/>
             </a:r>
             <a:endParaRPr lang="en-US" dirty="0"/>
           </a:p>
@@ -1250,11 +1128,7 @@
           <a:p>
             <a:r>
               <a:rPr lang="en-US" dirty="0"/>
-              <a:t>Instructions for "The Solution" slide:
-How you're different
-Core innovation
-Why it will work now
-Replace this content with your own information.</a:t>
+              <a:t/>
             </a:r>
             <a:endParaRPr lang="en-US" dirty="0"/>
           </a:p>
@@ -1342,11 +1216,7 @@
           <a:p>
             <a:r>
               <a:rPr lang="en-US" dirty="0"/>
-              <a:t>Instructions for "Product" slide:
-Product demo or mockup
-Key capabilities
-User experience
-Replace this content with your own information.</a:t>
+              <a:t/>
             </a:r>
             <a:endParaRPr lang="en-US" dirty="0"/>
           </a:p>
@@ -1434,11 +1304,7 @@
           <a:p>
             <a:r>
               <a:rPr lang="en-US" dirty="0"/>
-              <a:t>Instructions for "Market Opportunity" slide:
-Market size
-Growth trajectory
-Adjacent markets
-Replace this content with your own information.</a:t>
+              <a:t/>
             </a:r>
             <a:endParaRPr lang="en-US" dirty="0"/>
           </a:p>
@@ -1526,12 +1392,7 @@
           <a:p>
             <a:r>
               <a:rPr lang="en-US" dirty="0"/>
-              <a:t>Instructions for "Traction" slide:
-Early adopters
-Partnerships
-Pilot programs
-Letters of intent
-Replace this content with your own information.</a:t>
+              <a:t/>
             </a:r>
             <a:endParaRPr lang="en-US" dirty="0"/>
           </a:p>
@@ -1603,74 +1464,6 @@
 </p:sldLayout>
 </file>
 
-<file path=ppt/slideLayouts/slideLayout2.xml><?xml version="1.0" encoding="utf-8"?>
-<p:sldLayout xmlns:a="http://schemas.openxmlformats.org/drawingml/2006/main" xmlns:r="http://schemas.openxmlformats.org/officeDocument/2006/relationships" xmlns:p="http://schemas.openxmlformats.org/presentationml/2006/main" preserve="1">
-  <p:cSld name="MASTER_SLIDE">
-    <p:bg>
-      <p:bgPr>
-        <a:solidFill>
-          <a:srgbClr val="FFFFFF"/>
-        </a:solidFill>
-      </p:bgPr>
-    </p:bg>
-    <p:spTree>
-      <p:nvGrpSpPr>
-        <p:cNvPr id="1" name=""/>
-        <p:cNvGrpSpPr/>
-        <p:nvPr/>
-      </p:nvGrpSpPr>
-      <p:grpSpPr>
-        <a:xfrm>
-          <a:off x="0" y="0"/>
-          <a:ext cx="0" cy="0"/>
-          <a:chOff x="0" y="0"/>
-          <a:chExt cx="0" cy="0"/>
-        </a:xfrm>
-      </p:grpSpPr>
-      <p:sp>
-        <p:nvSpPr>
-          <p:cNvPr id="2" name="Text 0"/>
-          <p:cNvSpPr/>
-          <p:nvPr/>
-        </p:nvSpPr>
-        <p:spPr>
-          <a:xfrm>
-            <a:off x="457200" y="6217920"/>
-            <a:ext cx="8229600" cy="274320"/>
-          </a:xfrm>
-          <a:prstGeom prst="rect">
-            <a:avLst/>
-          </a:prstGeom>
-          <a:noFill/>
-          <a:ln/>
-        </p:spPr>
-        <p:txBody>
-          <a:bodyPr wrap="square" rtlCol="0" anchor="ctr"/>
-          <a:lstStyle/>
-          <a:p>
-            <a:pPr algn="r" indent="0" marL="0">
-              <a:buNone/>
-            </a:pPr>
-            <a:r>
-              <a:rPr lang="en-US" sz="1000" dirty="0">
-                <a:solidFill>
-                  <a:srgbClr val="666666"/>
-                </a:solidFill>
-              </a:rPr>
-              <a:t>Creatives Takeover</a:t>
-            </a:r>
-            <a:endParaRPr lang="en-US" sz="1000" dirty="0"/>
-          </a:p>
-        </p:txBody>
-      </p:sp>
-    </p:spTree>
-  </p:cSld>
-  <p:clrMapOvr>
-    <a:masterClrMapping/>
-  </p:clrMapOvr>
-</p:sldLayout>
-</file>
-
 <file path=ppt/slideMasters/slideMaster1.xml><?xml version="1.0" encoding="utf-8"?>
 <p:sldMaster xmlns:a="http://schemas.openxmlformats.org/drawingml/2006/main" xmlns:r="http://schemas.openxmlformats.org/officeDocument/2006/relationships" xmlns:p="http://schemas.openxmlformats.org/presentationml/2006/main">
   <p:cSld>
@@ -1693,7 +1486,6 @@
   <p:clrMap bg1="lt1" tx1="dk1" bg2="lt2" tx2="dk2" accent1="accent1" accent2="accent2" accent3="accent3" accent4="accent4" accent5="accent5" accent6="accent6" hlink="hlink" folHlink="folHlink"/>
   <p:sldLayoutIdLst>
     <p:sldLayoutId id="2147483649" r:id="rId1"/>
-    <p:sldLayoutId id="2147483650" r:id="rId2"/>
   </p:sldLayoutIdLst>
   <p:hf sldNum="0" hdr="0" ftr="0" dt="0"/>
   <p:txStyles>
@@ -1982,7 +1774,7 @@
         <p:spPr>
           <a:xfrm>
             <a:off x="457200" y="2286000"/>
-            <a:ext cx="8229600" cy="1371600"/>
+            <a:ext cx="8229600" cy="1097280"/>
           </a:xfrm>
           <a:prstGeom prst="rect">
             <a:avLst/>
@@ -1998,14 +1790,17 @@
               <a:buNone/>
             </a:pPr>
             <a:r>
-              <a:rPr lang="en-US" sz="4400" b="1" dirty="0">
+              <a:rPr lang="en-US" sz="4800" b="1" dirty="0">
                 <a:solidFill>
                   <a:srgbClr val="FFFFFF"/>
                 </a:solidFill>
-              </a:rPr>
-              <a:t>Vision-Driven Deck</a:t>
-            </a:r>
-            <a:endParaRPr lang="en-US" sz="4400" dirty="0"/>
+                <a:latin typeface="Calibri" pitchFamily="34" charset="0"/>
+                <a:ea typeface="Calibri" pitchFamily="34" charset="-122"/>
+                <a:cs typeface="Calibri" pitchFamily="34" charset="-120"/>
+              </a:rPr>
+              <a:t>Your Company Name</a:t>
+            </a:r>
+            <a:endParaRPr lang="en-US" sz="4800" dirty="0"/>
           </a:p>
         </p:txBody>
       </p:sp>
@@ -2017,8 +1812,8 @@
         </p:nvSpPr>
         <p:spPr>
           <a:xfrm>
-            <a:off x="457200" y="3657600"/>
-            <a:ext cx="8229600" cy="457200"/>
+            <a:off x="457200" y="3474720"/>
+            <a:ext cx="8229600" cy="548640"/>
           </a:xfrm>
           <a:prstGeom prst="rect">
             <a:avLst/>
@@ -2034,50 +1829,17 @@
               <a:buNone/>
             </a:pPr>
             <a:r>
-              <a:rPr lang="en-US" sz="2000" dirty="0">
+              <a:rPr lang="en-US" sz="2400" dirty="0">
                 <a:solidFill>
                   <a:srgbClr val="38BDF8"/>
                 </a:solidFill>
-              </a:rPr>
-              <a:t>Editable Template</a:t>
-            </a:r>
-            <a:endParaRPr lang="en-US" sz="2000" dirty="0"/>
-          </a:p>
-        </p:txBody>
-      </p:sp>
-      <p:sp>
-        <p:nvSpPr>
-          <p:cNvPr id="4" name="Text 2"/>
-          <p:cNvSpPr/>
-          <p:nvPr/>
-        </p:nvSpPr>
-        <p:spPr>
-          <a:xfrm>
-            <a:off x="457200" y="4297680"/>
-            <a:ext cx="8229600" cy="274320"/>
-          </a:xfrm>
-          <a:prstGeom prst="rect">
-            <a:avLst/>
-          </a:prstGeom>
-          <a:noFill/>
-          <a:ln/>
-        </p:spPr>
-        <p:txBody>
-          <a:bodyPr wrap="square" rtlCol="0" anchor="ctr"/>
-          <a:lstStyle/>
-          <a:p>
-            <a:pPr algn="ctr" indent="0" marL="0">
-              <a:buNone/>
-            </a:pPr>
-            <a:r>
-              <a:rPr lang="en-US" sz="1400" dirty="0">
-                <a:solidFill>
-                  <a:srgbClr val="CCCCCC"/>
-                </a:solidFill>
-              </a:rPr>
-              <a:t>Created by Creatives Takeover</a:t>
-            </a:r>
-            <a:endParaRPr lang="en-US" sz="1400" dirty="0"/>
+                <a:latin typeface="Calibri" pitchFamily="34" charset="0"/>
+                <a:ea typeface="Calibri" pitchFamily="34" charset="-122"/>
+                <a:cs typeface="Calibri" pitchFamily="34" charset="-120"/>
+              </a:rPr>
+              <a:t>Reimagining the future of [industry]</a:t>
+            </a:r>
+            <a:endParaRPr lang="en-US" sz="2400" dirty="0"/>
           </a:p>
         </p:txBody>
       </p:sp>
@@ -2092,6 +1854,13 @@
 <file path=ppt/slides/slide10.xml><?xml version="1.0" encoding="utf-8"?>
 <p:sld xmlns:a="http://schemas.openxmlformats.org/drawingml/2006/main" xmlns:r="http://schemas.openxmlformats.org/officeDocument/2006/relationships" xmlns:p="http://schemas.openxmlformats.org/presentationml/2006/main">
   <p:cSld name="Slide 10">
+    <p:bg>
+      <p:bgPr>
+        <a:solidFill>
+          <a:srgbClr val="FFFFFF"/>
+        </a:solidFill>
+      </p:bgPr>
+    </p:bg>
     <p:spTree>
       <p:nvGrpSpPr>
         <p:cNvPr id="1" name=""/>
@@ -2108,14 +1877,34 @@
       </p:grpSpPr>
       <p:sp>
         <p:nvSpPr>
-          <p:cNvPr id="2" name="Text 0"/>
-          <p:cNvSpPr/>
-          <p:nvPr/>
-        </p:nvSpPr>
-        <p:spPr>
-          <a:xfrm>
-            <a:off x="457200" y="457200"/>
-            <a:ext cx="8229600" cy="685800"/>
+          <p:cNvPr id="2" name="Shape 0"/>
+          <p:cNvSpPr/>
+          <p:nvPr/>
+        </p:nvSpPr>
+        <p:spPr>
+          <a:xfrm>
+            <a:off x="0" y="0"/>
+            <a:ext cx="9144000" cy="137160"/>
+          </a:xfrm>
+          <a:prstGeom prst="rect">
+            <a:avLst/>
+          </a:prstGeom>
+          <a:solidFill>
+            <a:srgbClr val="0B1437"/>
+          </a:solidFill>
+          <a:ln/>
+        </p:spPr>
+      </p:sp>
+      <p:sp>
+        <p:nvSpPr>
+          <p:cNvPr id="3" name="Text 1"/>
+          <p:cNvSpPr/>
+          <p:nvPr/>
+        </p:nvSpPr>
+        <p:spPr>
+          <a:xfrm>
+            <a:off x="457200" y="365760"/>
+            <a:ext cx="8229600" cy="548640"/>
           </a:xfrm>
           <a:prstGeom prst="rect">
             <a:avLst/>
@@ -2135,8 +1924,11 @@
                 <a:solidFill>
                   <a:srgbClr val="0B1437"/>
                 </a:solidFill>
-              </a:rPr>
-              <a:t>Go-to-Market</a:t>
+                <a:latin typeface="Calibri" pitchFamily="34" charset="0"/>
+                <a:ea typeface="Calibri" pitchFamily="34" charset="-122"/>
+                <a:cs typeface="Calibri" pitchFamily="34" charset="-120"/>
+              </a:rPr>
+              <a:t>The Team</a:t>
             </a:r>
             <a:endParaRPr lang="en-US" sz="3200" dirty="0"/>
           </a:p>
@@ -2144,7 +1936,46 @@
       </p:sp>
       <p:sp>
         <p:nvSpPr>
-          <p:cNvPr id="3" name="Text 1"/>
+          <p:cNvPr id="4" name="Text 2"/>
+          <p:cNvSpPr/>
+          <p:nvPr/>
+        </p:nvSpPr>
+        <p:spPr>
+          <a:xfrm>
+            <a:off x="457200" y="914400"/>
+            <a:ext cx="8229600" cy="365760"/>
+          </a:xfrm>
+          <a:prstGeom prst="rect">
+            <a:avLst/>
+          </a:prstGeom>
+          <a:noFill/>
+          <a:ln/>
+        </p:spPr>
+        <p:txBody>
+          <a:bodyPr wrap="square" rtlCol="0" anchor="ctr"/>
+          <a:lstStyle/>
+          <a:p>
+            <a:pPr indent="0" marL="0">
+              <a:buNone/>
+            </a:pPr>
+            <a:r>
+              <a:rPr lang="en-US" sz="1600" i="1" dirty="0">
+                <a:solidFill>
+                  <a:srgbClr val="6B7280"/>
+                </a:solidFill>
+                <a:latin typeface="Calibri" pitchFamily="34" charset="0"/>
+                <a:ea typeface="Calibri" pitchFamily="34" charset="-122"/>
+                <a:cs typeface="Calibri" pitchFamily="34" charset="-120"/>
+              </a:rPr>
+              <a:t>Why we can execute this vision</a:t>
+            </a:r>
+            <a:endParaRPr lang="en-US" sz="1600" dirty="0"/>
+          </a:p>
+        </p:txBody>
+      </p:sp>
+      <p:sp>
+        <p:nvSpPr>
+          <p:cNvPr id="5" name="Text 3"/>
           <p:cNvSpPr/>
           <p:nvPr/>
         </p:nvSpPr>
@@ -2171,14 +2002,17 @@
               <a:buChar char="•"/>
             </a:pPr>
             <a:r>
-              <a:rPr lang="en-US" sz="1600" dirty="0">
-                <a:solidFill>
-                  <a:srgbClr val="374151"/>
-                </a:solidFill>
-              </a:rPr>
-              <a:t>Customer acquisition strategy</a:t>
-            </a:r>
-            <a:endParaRPr lang="en-US" sz="1600" dirty="0"/>
+              <a:rPr lang="en-US" sz="1800" b="1" dirty="0">
+                <a:solidFill>
+                  <a:srgbClr val="1F2937"/>
+                </a:solidFill>
+                <a:latin typeface="Calibri" pitchFamily="34" charset="0"/>
+                <a:ea typeface="Calibri" pitchFamily="34" charset="-122"/>
+                <a:cs typeface="Calibri" pitchFamily="34" charset="-120"/>
+              </a:rPr>
+              <a:t>CEO: Jane Doe - Ex-Google PM, sold fintech startup for $20M</a:t>
+            </a:r>
+            <a:endParaRPr lang="en-US" sz="1800" dirty="0"/>
           </a:p>
           <a:p>
             <a:pPr marL="342900" indent="-342900">
@@ -2189,14 +2023,17 @@
               <a:buChar char="•"/>
             </a:pPr>
             <a:r>
-              <a:rPr lang="en-US" sz="1600" dirty="0">
-                <a:solidFill>
-                  <a:srgbClr val="374151"/>
-                </a:solidFill>
-              </a:rPr>
-              <a:t>Distribution channels</a:t>
-            </a:r>
-            <a:endParaRPr lang="en-US" sz="1600" dirty="0"/>
+              <a:rPr lang="en-US" sz="1800" b="1" dirty="0">
+                <a:solidFill>
+                  <a:srgbClr val="1F2937"/>
+                </a:solidFill>
+                <a:latin typeface="Calibri" pitchFamily="34" charset="0"/>
+                <a:ea typeface="Calibri" pitchFamily="34" charset="-122"/>
+                <a:cs typeface="Calibri" pitchFamily="34" charset="-120"/>
+              </a:rPr>
+              <a:t>CTO: John Smith - Former Stripe engineer, AI/ML expert</a:t>
+            </a:r>
+            <a:endParaRPr lang="en-US" sz="1800" dirty="0"/>
           </a:p>
           <a:p>
             <a:pPr marL="342900" indent="-342900">
@@ -2207,14 +2044,17 @@
               <a:buChar char="•"/>
             </a:pPr>
             <a:r>
-              <a:rPr lang="en-US" sz="1600" dirty="0">
-                <a:solidFill>
-                  <a:srgbClr val="374151"/>
-                </a:solidFill>
-              </a:rPr>
-              <a:t>Growth loops</a:t>
-            </a:r>
-            <a:endParaRPr lang="en-US" sz="1600" dirty="0"/>
+              <a:rPr lang="en-US" sz="1800" b="1" dirty="0">
+                <a:solidFill>
+                  <a:srgbClr val="1F2937"/>
+                </a:solidFill>
+                <a:latin typeface="Calibri" pitchFamily="34" charset="0"/>
+                <a:ea typeface="Calibri" pitchFamily="34" charset="-122"/>
+                <a:cs typeface="Calibri" pitchFamily="34" charset="-120"/>
+              </a:rPr>
+              <a:t>Chief Scientist: Dr. Emily Chen - PhD in Machine Learning, published researcher</a:t>
+            </a:r>
+            <a:endParaRPr lang="en-US" sz="1800" dirty="0"/>
           </a:p>
           <a:p>
             <a:pPr marL="342900" indent="-342900">
@@ -2225,14 +2065,115 @@
               <a:buChar char="•"/>
             </a:pPr>
             <a:r>
-              <a:rPr lang="en-US" sz="1600" dirty="0">
-                <a:solidFill>
-                  <a:srgbClr val="374151"/>
-                </a:solidFill>
-              </a:rPr>
-              <a:t>Network effects</a:t>
-            </a:r>
-            <a:endParaRPr lang="en-US" sz="1600" dirty="0"/>
+              <a:rPr lang="en-US" sz="1800" b="1" dirty="0">
+                <a:solidFill>
+                  <a:srgbClr val="1F2937"/>
+                </a:solidFill>
+                <a:latin typeface="Calibri" pitchFamily="34" charset="0"/>
+                <a:ea typeface="Calibri" pitchFamily="34" charset="-122"/>
+                <a:cs typeface="Calibri" pitchFamily="34" charset="-120"/>
+              </a:rPr>
+              <a:t>Advisors: Former executives from Intuit, Square, and Andreessen Horowitz</a:t>
+            </a:r>
+            <a:endParaRPr lang="en-US" sz="1800" dirty="0"/>
+          </a:p>
+        </p:txBody>
+      </p:sp>
+      <p:sp>
+        <p:nvSpPr>
+          <p:cNvPr id="6" name="Shape 4"/>
+          <p:cNvSpPr/>
+          <p:nvPr/>
+        </p:nvSpPr>
+        <p:spPr>
+          <a:xfrm>
+            <a:off x="0" y="6720840"/>
+            <a:ext cx="73152" cy="137160"/>
+          </a:xfrm>
+          <a:prstGeom prst="rect">
+            <a:avLst/>
+          </a:prstGeom>
+          <a:solidFill>
+            <a:srgbClr val="38BDF8"/>
+          </a:solidFill>
+          <a:ln/>
+        </p:spPr>
+      </p:sp>
+      <p:sp>
+        <p:nvSpPr>
+          <p:cNvPr id="7" name="Text 5"/>
+          <p:cNvSpPr/>
+          <p:nvPr/>
+        </p:nvSpPr>
+        <p:spPr>
+          <a:xfrm>
+            <a:off x="274320" y="6720840"/>
+            <a:ext cx="2743200" cy="137160"/>
+          </a:xfrm>
+          <a:prstGeom prst="rect">
+            <a:avLst/>
+          </a:prstGeom>
+          <a:noFill/>
+          <a:ln/>
+        </p:spPr>
+        <p:txBody>
+          <a:bodyPr wrap="square" rtlCol="0" anchor="ctr"/>
+          <a:lstStyle/>
+          <a:p>
+            <a:pPr indent="0" marL="0">
+              <a:buNone/>
+            </a:pPr>
+            <a:r>
+              <a:rPr lang="en-US" sz="1000" dirty="0">
+                <a:solidFill>
+                  <a:srgbClr val="6B7280"/>
+                </a:solidFill>
+                <a:latin typeface="Calibri" pitchFamily="34" charset="0"/>
+                <a:ea typeface="Calibri" pitchFamily="34" charset="-122"/>
+                <a:cs typeface="Calibri" pitchFamily="34" charset="-120"/>
+              </a:rPr>
+              <a:t>Creatives Takeover</a:t>
+            </a:r>
+            <a:endParaRPr lang="en-US" sz="1000" dirty="0"/>
+          </a:p>
+        </p:txBody>
+      </p:sp>
+      <p:sp>
+        <p:nvSpPr>
+          <p:cNvPr id="8" name="Text 6"/>
+          <p:cNvSpPr/>
+          <p:nvPr/>
+        </p:nvSpPr>
+        <p:spPr>
+          <a:xfrm>
+            <a:off x="8412480" y="6720840"/>
+            <a:ext cx="274320" cy="137160"/>
+          </a:xfrm>
+          <a:prstGeom prst="rect">
+            <a:avLst/>
+          </a:prstGeom>
+          <a:noFill/>
+          <a:ln/>
+        </p:spPr>
+        <p:txBody>
+          <a:bodyPr wrap="square" rtlCol="0" anchor="ctr"/>
+          <a:lstStyle/>
+          <a:p>
+            <a:pPr algn="r" indent="0" marL="0">
+              <a:buNone/>
+            </a:pPr>
+            <a:r>
+              <a:rPr lang="en-US" sz="1000" dirty="0">
+                <a:solidFill>
+                  <a:srgbClr val="6B7280"/>
+                </a:solidFill>
+                <a:latin typeface="Calibri" pitchFamily="34" charset="0"/>
+                <a:ea typeface="Calibri" pitchFamily="34" charset="-122"/>
+                <a:cs typeface="Calibri" pitchFamily="34" charset="-120"/>
+              </a:rPr>
+              <a:t>10</a:t>
+            </a:r>
+            <a:endParaRPr lang="en-US" sz="1000" dirty="0"/>
           </a:p>
         </p:txBody>
       </p:sp>
@@ -2247,6 +2188,13 @@
 <file path=ppt/slides/slide11.xml><?xml version="1.0" encoding="utf-8"?>
 <p:sld xmlns:a="http://schemas.openxmlformats.org/drawingml/2006/main" xmlns:r="http://schemas.openxmlformats.org/officeDocument/2006/relationships" xmlns:p="http://schemas.openxmlformats.org/presentationml/2006/main">
   <p:cSld name="Slide 11">
+    <p:bg>
+      <p:bgPr>
+        <a:solidFill>
+          <a:srgbClr val="FFFFFF"/>
+        </a:solidFill>
+      </p:bgPr>
+    </p:bg>
     <p:spTree>
       <p:nvGrpSpPr>
         <p:cNvPr id="1" name=""/>
@@ -2263,14 +2211,34 @@
       </p:grpSpPr>
       <p:sp>
         <p:nvSpPr>
-          <p:cNvPr id="2" name="Text 0"/>
-          <p:cNvSpPr/>
-          <p:nvPr/>
-        </p:nvSpPr>
-        <p:spPr>
-          <a:xfrm>
-            <a:off x="457200" y="457200"/>
-            <a:ext cx="8229600" cy="685800"/>
+          <p:cNvPr id="2" name="Shape 0"/>
+          <p:cNvSpPr/>
+          <p:nvPr/>
+        </p:nvSpPr>
+        <p:spPr>
+          <a:xfrm>
+            <a:off x="0" y="0"/>
+            <a:ext cx="9144000" cy="137160"/>
+          </a:xfrm>
+          <a:prstGeom prst="rect">
+            <a:avLst/>
+          </a:prstGeom>
+          <a:solidFill>
+            <a:srgbClr val="0B1437"/>
+          </a:solidFill>
+          <a:ln/>
+        </p:spPr>
+      </p:sp>
+      <p:sp>
+        <p:nvSpPr>
+          <p:cNvPr id="3" name="Text 1"/>
+          <p:cNvSpPr/>
+          <p:nvPr/>
+        </p:nvSpPr>
+        <p:spPr>
+          <a:xfrm>
+            <a:off x="457200" y="365760"/>
+            <a:ext cx="8229600" cy="548640"/>
           </a:xfrm>
           <a:prstGeom prst="rect">
             <a:avLst/>
@@ -2290,8 +2258,11 @@
                 <a:solidFill>
                   <a:srgbClr val="0B1437"/>
                 </a:solidFill>
-              </a:rPr>
-              <a:t>Team</a:t>
+                <a:latin typeface="Calibri" pitchFamily="34" charset="0"/>
+                <a:ea typeface="Calibri" pitchFamily="34" charset="-122"/>
+                <a:cs typeface="Calibri" pitchFamily="34" charset="-120"/>
+              </a:rPr>
+              <a:t>The Ask</a:t>
             </a:r>
             <a:endParaRPr lang="en-US" sz="3200" dirty="0"/>
           </a:p>
@@ -2299,7 +2270,46 @@
       </p:sp>
       <p:sp>
         <p:nvSpPr>
-          <p:cNvPr id="3" name="Text 1"/>
+          <p:cNvPr id="4" name="Text 2"/>
+          <p:cNvSpPr/>
+          <p:nvPr/>
+        </p:nvSpPr>
+        <p:spPr>
+          <a:xfrm>
+            <a:off x="457200" y="914400"/>
+            <a:ext cx="8229600" cy="365760"/>
+          </a:xfrm>
+          <a:prstGeom prst="rect">
+            <a:avLst/>
+          </a:prstGeom>
+          <a:noFill/>
+          <a:ln/>
+        </p:spPr>
+        <p:txBody>
+          <a:bodyPr wrap="square" rtlCol="0" anchor="ctr"/>
+          <a:lstStyle/>
+          <a:p>
+            <a:pPr indent="0" marL="0">
+              <a:buNone/>
+            </a:pPr>
+            <a:r>
+              <a:rPr lang="en-US" sz="1600" i="1" dirty="0">
+                <a:solidFill>
+                  <a:srgbClr val="6B7280"/>
+                </a:solidFill>
+                <a:latin typeface="Calibri" pitchFamily="34" charset="0"/>
+                <a:ea typeface="Calibri" pitchFamily="34" charset="-122"/>
+                <a:cs typeface="Calibri" pitchFamily="34" charset="-120"/>
+              </a:rPr>
+              <a:t>Join us in building the future</a:t>
+            </a:r>
+            <a:endParaRPr lang="en-US" sz="1600" dirty="0"/>
+          </a:p>
+        </p:txBody>
+      </p:sp>
+      <p:sp>
+        <p:nvSpPr>
+          <p:cNvPr id="5" name="Text 3"/>
           <p:cNvSpPr/>
           <p:nvPr/>
         </p:nvSpPr>
@@ -2326,14 +2336,17 @@
               <a:buChar char="•"/>
             </a:pPr>
             <a:r>
-              <a:rPr lang="en-US" sz="1600" dirty="0">
-                <a:solidFill>
-                  <a:srgbClr val="374151"/>
-                </a:solidFill>
-              </a:rPr>
-              <a:t>Unique founder-market fit</a:t>
-            </a:r>
-            <a:endParaRPr lang="en-US" sz="1600" dirty="0"/>
+              <a:rPr lang="en-US" sz="2400" b="1" dirty="0">
+                <a:solidFill>
+                  <a:srgbClr val="0B1437"/>
+                </a:solidFill>
+                <a:latin typeface="Calibri" pitchFamily="34" charset="0"/>
+                <a:ea typeface="Calibri" pitchFamily="34" charset="-122"/>
+                <a:cs typeface="Calibri" pitchFamily="34" charset="-120"/>
+              </a:rPr>
+              <a:t>Raising $5M Seed Round</a:t>
+            </a:r>
+            <a:endParaRPr lang="en-US" sz="2400" dirty="0"/>
           </a:p>
           <a:p>
             <a:pPr marL="342900" indent="-342900">
@@ -2344,14 +2357,17 @@
               <a:buChar char="•"/>
             </a:pPr>
             <a:r>
-              <a:rPr lang="en-US" sz="1600" dirty="0">
-                <a:solidFill>
-                  <a:srgbClr val="374151"/>
-                </a:solidFill>
-              </a:rPr>
-              <a:t>Unfair advantages</a:t>
-            </a:r>
-            <a:endParaRPr lang="en-US" sz="1600" dirty="0"/>
+              <a:rPr lang="en-US" sz="1800" b="1" dirty="0">
+                <a:solidFill>
+                  <a:srgbClr val="1F2937"/>
+                </a:solidFill>
+                <a:latin typeface="Calibri" pitchFamily="34" charset="0"/>
+                <a:ea typeface="Calibri" pitchFamily="34" charset="-122"/>
+                <a:cs typeface="Calibri" pitchFamily="34" charset="-120"/>
+              </a:rPr>
+              <a:t>Looking for mission-aligned investors who believe in our vision</a:t>
+            </a:r>
+            <a:endParaRPr lang="en-US" sz="2400" dirty="0"/>
           </a:p>
           <a:p>
             <a:pPr marL="342900" indent="-342900">
@@ -2362,14 +2378,80 @@
               <a:buChar char="•"/>
             </a:pPr>
             <a:r>
-              <a:rPr lang="en-US" sz="1600" dirty="0">
-                <a:solidFill>
-                  <a:srgbClr val="374151"/>
-                </a:solidFill>
-              </a:rPr>
-              <a:t>Previous successes</a:t>
-            </a:r>
-            <a:endParaRPr lang="en-US" sz="1600" dirty="0"/>
+              <a:rPr lang="en-US" sz="1800" b="1" dirty="0">
+                <a:solidFill>
+                  <a:srgbClr val="1F2937"/>
+                </a:solidFill>
+                <a:latin typeface="Calibri" pitchFamily="34" charset="0"/>
+                <a:ea typeface="Calibri" pitchFamily="34" charset="-122"/>
+                <a:cs typeface="Calibri" pitchFamily="34" charset="-120"/>
+              </a:rPr>
+              <a:t>Use of Funds:</a:t>
+            </a:r>
+            <a:endParaRPr lang="en-US" sz="2400" dirty="0"/>
+          </a:p>
+          <a:p>
+            <a:pPr lvl="1" marL="685800" indent="-342900">
+              <a:lnSpc>
+                <a:spcPts val="2800"/>
+              </a:lnSpc>
+              <a:buSzPct val="100000"/>
+              <a:buChar char="•"/>
+            </a:pPr>
+            <a:r>
+              <a:rPr lang="en-US" sz="1800" dirty="0">
+                <a:solidFill>
+                  <a:srgbClr val="6B7280"/>
+                </a:solidFill>
+                <a:latin typeface="Calibri" pitchFamily="34" charset="0"/>
+                <a:ea typeface="Calibri" pitchFamily="34" charset="-122"/>
+                <a:cs typeface="Calibri" pitchFamily="34" charset="-120"/>
+              </a:rPr>
+              <a:t>60% - Product &amp; Engineering (build the platform)</a:t>
+            </a:r>
+            <a:endParaRPr lang="en-US" sz="2400" dirty="0"/>
+          </a:p>
+          <a:p>
+            <a:pPr lvl="1" marL="685800" indent="-342900">
+              <a:lnSpc>
+                <a:spcPts val="2800"/>
+              </a:lnSpc>
+              <a:buSzPct val="100000"/>
+              <a:buChar char="•"/>
+            </a:pPr>
+            <a:r>
+              <a:rPr lang="en-US" sz="1800" dirty="0">
+                <a:solidFill>
+                  <a:srgbClr val="6B7280"/>
+                </a:solidFill>
+                <a:latin typeface="Calibri" pitchFamily="34" charset="0"/>
+                <a:ea typeface="Calibri" pitchFamily="34" charset="-122"/>
+                <a:cs typeface="Calibri" pitchFamily="34" charset="-120"/>
+              </a:rPr>
+              <a:t>25% - AI Research &amp; Development</a:t>
+            </a:r>
+            <a:endParaRPr lang="en-US" sz="2400" dirty="0"/>
+          </a:p>
+          <a:p>
+            <a:pPr lvl="1" marL="685800" indent="-342900">
+              <a:lnSpc>
+                <a:spcPts val="2800"/>
+              </a:lnSpc>
+              <a:buSzPct val="100000"/>
+              <a:buChar char="•"/>
+            </a:pPr>
+            <a:r>
+              <a:rPr lang="en-US" sz="1800" dirty="0">
+                <a:solidFill>
+                  <a:srgbClr val="6B7280"/>
+                </a:solidFill>
+                <a:latin typeface="Calibri" pitchFamily="34" charset="0"/>
+                <a:ea typeface="Calibri" pitchFamily="34" charset="-122"/>
+                <a:cs typeface="Calibri" pitchFamily="34" charset="-120"/>
+              </a:rPr>
+              <a:t>15% - Early customer acquisition and partnerships</a:t>
+            </a:r>
+            <a:endParaRPr lang="en-US" sz="2400" dirty="0"/>
           </a:p>
           <a:p>
             <a:pPr marL="342900" indent="-342900">
@@ -2380,14 +2462,115 @@
               <a:buChar char="•"/>
             </a:pPr>
             <a:r>
-              <a:rPr lang="en-US" sz="1600" dirty="0">
-                <a:solidFill>
-                  <a:srgbClr val="374151"/>
-                </a:solidFill>
-              </a:rPr>
-              <a:t>Commitment to the mission</a:t>
-            </a:r>
-            <a:endParaRPr lang="en-US" sz="1600" dirty="0"/>
+              <a:rPr lang="en-US" sz="1800" b="1" dirty="0">
+                <a:solidFill>
+                  <a:srgbClr val="1F2937"/>
+                </a:solidFill>
+                <a:latin typeface="Calibri" pitchFamily="34" charset="0"/>
+                <a:ea typeface="Calibri" pitchFamily="34" charset="-122"/>
+                <a:cs typeface="Calibri" pitchFamily="34" charset="-120"/>
+              </a:rPr>
+              <a:t>24-month milestones: Launch V1, 10K users, $1M ARR</a:t>
+            </a:r>
+            <a:endParaRPr lang="en-US" sz="2400" dirty="0"/>
+          </a:p>
+        </p:txBody>
+      </p:sp>
+      <p:sp>
+        <p:nvSpPr>
+          <p:cNvPr id="6" name="Shape 4"/>
+          <p:cNvSpPr/>
+          <p:nvPr/>
+        </p:nvSpPr>
+        <p:spPr>
+          <a:xfrm>
+            <a:off x="0" y="6720840"/>
+            <a:ext cx="73152" cy="137160"/>
+          </a:xfrm>
+          <a:prstGeom prst="rect">
+            <a:avLst/>
+          </a:prstGeom>
+          <a:solidFill>
+            <a:srgbClr val="38BDF8"/>
+          </a:solidFill>
+          <a:ln/>
+        </p:spPr>
+      </p:sp>
+      <p:sp>
+        <p:nvSpPr>
+          <p:cNvPr id="7" name="Text 5"/>
+          <p:cNvSpPr/>
+          <p:nvPr/>
+        </p:nvSpPr>
+        <p:spPr>
+          <a:xfrm>
+            <a:off x="274320" y="6720840"/>
+            <a:ext cx="2743200" cy="137160"/>
+          </a:xfrm>
+          <a:prstGeom prst="rect">
+            <a:avLst/>
+          </a:prstGeom>
+          <a:noFill/>
+          <a:ln/>
+        </p:spPr>
+        <p:txBody>
+          <a:bodyPr wrap="square" rtlCol="0" anchor="ctr"/>
+          <a:lstStyle/>
+          <a:p>
+            <a:pPr indent="0" marL="0">
+              <a:buNone/>
+            </a:pPr>
+            <a:r>
+              <a:rPr lang="en-US" sz="1000" dirty="0">
+                <a:solidFill>
+                  <a:srgbClr val="6B7280"/>
+                </a:solidFill>
+                <a:latin typeface="Calibri" pitchFamily="34" charset="0"/>
+                <a:ea typeface="Calibri" pitchFamily="34" charset="-122"/>
+                <a:cs typeface="Calibri" pitchFamily="34" charset="-120"/>
+              </a:rPr>
+              <a:t>Creatives Takeover</a:t>
+            </a:r>
+            <a:endParaRPr lang="en-US" sz="1000" dirty="0"/>
+          </a:p>
+        </p:txBody>
+      </p:sp>
+      <p:sp>
+        <p:nvSpPr>
+          <p:cNvPr id="8" name="Text 6"/>
+          <p:cNvSpPr/>
+          <p:nvPr/>
+        </p:nvSpPr>
+        <p:spPr>
+          <a:xfrm>
+            <a:off x="8412480" y="6720840"/>
+            <a:ext cx="274320" cy="137160"/>
+          </a:xfrm>
+          <a:prstGeom prst="rect">
+            <a:avLst/>
+          </a:prstGeom>
+          <a:noFill/>
+          <a:ln/>
+        </p:spPr>
+        <p:txBody>
+          <a:bodyPr wrap="square" rtlCol="0" anchor="ctr"/>
+          <a:lstStyle/>
+          <a:p>
+            <a:pPr algn="r" indent="0" marL="0">
+              <a:buNone/>
+            </a:pPr>
+            <a:r>
+              <a:rPr lang="en-US" sz="1000" dirty="0">
+                <a:solidFill>
+                  <a:srgbClr val="6B7280"/>
+                </a:solidFill>
+                <a:latin typeface="Calibri" pitchFamily="34" charset="0"/>
+                <a:ea typeface="Calibri" pitchFamily="34" charset="-122"/>
+                <a:cs typeface="Calibri" pitchFamily="34" charset="-120"/>
+              </a:rPr>
+              <a:t>11</a:t>
+            </a:r>
+            <a:endParaRPr lang="en-US" sz="1000" dirty="0"/>
           </a:p>
         </p:txBody>
       </p:sp>
@@ -2399,9 +2582,16 @@
 </p:sld>
 </file>
 
-<file path=ppt/slides/slide12.xml><?xml version="1.0" encoding="utf-8"?>
+<file path=ppt/slides/slide2.xml><?xml version="1.0" encoding="utf-8"?>
 <p:sld xmlns:a="http://schemas.openxmlformats.org/drawingml/2006/main" xmlns:r="http://schemas.openxmlformats.org/officeDocument/2006/relationships" xmlns:p="http://schemas.openxmlformats.org/presentationml/2006/main">
-  <p:cSld name="Slide 12">
+  <p:cSld name="Slide 2">
+    <p:bg>
+      <p:bgPr>
+        <a:solidFill>
+          <a:srgbClr val="FFFFFF"/>
+        </a:solidFill>
+      </p:bgPr>
+    </p:bg>
     <p:spTree>
       <p:nvGrpSpPr>
         <p:cNvPr id="1" name=""/>
@@ -2418,14 +2608,34 @@
       </p:grpSpPr>
       <p:sp>
         <p:nvSpPr>
-          <p:cNvPr id="2" name="Text 0"/>
-          <p:cNvSpPr/>
-          <p:nvPr/>
-        </p:nvSpPr>
-        <p:spPr>
-          <a:xfrm>
-            <a:off x="457200" y="457200"/>
-            <a:ext cx="8229600" cy="685800"/>
+          <p:cNvPr id="2" name="Shape 0"/>
+          <p:cNvSpPr/>
+          <p:nvPr/>
+        </p:nvSpPr>
+        <p:spPr>
+          <a:xfrm>
+            <a:off x="0" y="0"/>
+            <a:ext cx="9144000" cy="137160"/>
+          </a:xfrm>
+          <a:prstGeom prst="rect">
+            <a:avLst/>
+          </a:prstGeom>
+          <a:solidFill>
+            <a:srgbClr val="0B1437"/>
+          </a:solidFill>
+          <a:ln/>
+        </p:spPr>
+      </p:sp>
+      <p:sp>
+        <p:nvSpPr>
+          <p:cNvPr id="3" name="Text 1"/>
+          <p:cNvSpPr/>
+          <p:nvPr/>
+        </p:nvSpPr>
+        <p:spPr>
+          <a:xfrm>
+            <a:off x="457200" y="365760"/>
+            <a:ext cx="8229600" cy="548640"/>
           </a:xfrm>
           <a:prstGeom prst="rect">
             <a:avLst/>
@@ -2445,8 +2655,11 @@
                 <a:solidFill>
                   <a:srgbClr val="0B1437"/>
                 </a:solidFill>
-              </a:rPr>
-              <a:t>The Ask</a:t>
+                <a:latin typeface="Calibri" pitchFamily="34" charset="0"/>
+                <a:ea typeface="Calibri" pitchFamily="34" charset="-122"/>
+                <a:cs typeface="Calibri" pitchFamily="34" charset="-120"/>
+              </a:rPr>
+              <a:t>The Big Vision</a:t>
             </a:r>
             <a:endParaRPr lang="en-US" sz="3200" dirty="0"/>
           </a:p>
@@ -2454,7 +2667,46 @@
       </p:sp>
       <p:sp>
         <p:nvSpPr>
-          <p:cNvPr id="3" name="Text 1"/>
+          <p:cNvPr id="4" name="Text 2"/>
+          <p:cNvSpPr/>
+          <p:nvPr/>
+        </p:nvSpPr>
+        <p:spPr>
+          <a:xfrm>
+            <a:off x="457200" y="914400"/>
+            <a:ext cx="8229600" cy="365760"/>
+          </a:xfrm>
+          <a:prstGeom prst="rect">
+            <a:avLst/>
+          </a:prstGeom>
+          <a:noFill/>
+          <a:ln/>
+        </p:spPr>
+        <p:txBody>
+          <a:bodyPr wrap="square" rtlCol="0" anchor="ctr"/>
+          <a:lstStyle/>
+          <a:p>
+            <a:pPr indent="0" marL="0">
+              <a:buNone/>
+            </a:pPr>
+            <a:r>
+              <a:rPr lang="en-US" sz="1600" i="1" dirty="0">
+                <a:solidFill>
+                  <a:srgbClr val="6B7280"/>
+                </a:solidFill>
+                <a:latin typeface="Calibri" pitchFamily="34" charset="0"/>
+                <a:ea typeface="Calibri" pitchFamily="34" charset="-122"/>
+                <a:cs typeface="Calibri" pitchFamily="34" charset="-120"/>
+              </a:rPr>
+              <a:t>What future are you building?</a:t>
+            </a:r>
+            <a:endParaRPr lang="en-US" sz="1600" dirty="0"/>
+          </a:p>
+        </p:txBody>
+      </p:sp>
+      <p:sp>
+        <p:nvSpPr>
+          <p:cNvPr id="5" name="Text 3"/>
           <p:cNvSpPr/>
           <p:nvPr/>
         </p:nvSpPr>
@@ -2481,14 +2733,38 @@
               <a:buChar char="•"/>
             </a:pPr>
             <a:r>
-              <a:rPr lang="en-US" sz="1600" dirty="0">
-                <a:solidFill>
-                  <a:srgbClr val="374151"/>
-                </a:solidFill>
-              </a:rPr>
-              <a:t>Investment ask</a:t>
-            </a:r>
-            <a:endParaRPr lang="en-US" sz="1600" dirty="0"/>
+              <a:rPr lang="en-US" sz="1800" b="1" dirty="0">
+                <a:solidFill>
+                  <a:srgbClr val="1F2937"/>
+                </a:solidFill>
+                <a:latin typeface="Calibri" pitchFamily="34" charset="0"/>
+                <a:ea typeface="Calibri" pitchFamily="34" charset="-122"/>
+                <a:cs typeface="Calibri" pitchFamily="34" charset="-120"/>
+              </a:rPr>
+              <a:t>Paint a picture of the world you're creating</a:t>
+            </a:r>
+            <a:endParaRPr lang="en-US" sz="1800" dirty="0"/>
+          </a:p>
+          <a:p>
+            <a:pPr lvl="1" marL="685800" indent="-342900">
+              <a:lnSpc>
+                <a:spcPts val="2800"/>
+              </a:lnSpc>
+              <a:buSzPct val="100000"/>
+              <a:buChar char="•"/>
+            </a:pPr>
+            <a:r>
+              <a:rPr lang="en-US" sz="1800" dirty="0">
+                <a:solidFill>
+                  <a:srgbClr val="6B7280"/>
+                </a:solidFill>
+                <a:latin typeface="Calibri" pitchFamily="34" charset="0"/>
+                <a:ea typeface="Calibri" pitchFamily="34" charset="-122"/>
+                <a:cs typeface="Calibri" pitchFamily="34" charset="-120"/>
+              </a:rPr>
+              <a:t>Example: "A world where every small business has access to enterprise-grade financial tools"</a:t>
+            </a:r>
+            <a:endParaRPr lang="en-US" sz="1800" dirty="0"/>
           </a:p>
           <a:p>
             <a:pPr marL="342900" indent="-342900">
@@ -2499,14 +2775,38 @@
               <a:buChar char="•"/>
             </a:pPr>
             <a:r>
-              <a:rPr lang="en-US" sz="1600" dirty="0">
-                <a:solidFill>
-                  <a:srgbClr val="374151"/>
-                </a:solidFill>
-              </a:rPr>
-              <a:t>What you'll achieve together</a:t>
-            </a:r>
-            <a:endParaRPr lang="en-US" sz="1600" dirty="0"/>
+              <a:rPr lang="en-US" sz="1800" b="1" dirty="0">
+                <a:solidFill>
+                  <a:srgbClr val="1F2937"/>
+                </a:solidFill>
+                <a:latin typeface="Calibri" pitchFamily="34" charset="0"/>
+                <a:ea typeface="Calibri" pitchFamily="34" charset="-122"/>
+                <a:cs typeface="Calibri" pitchFamily="34" charset="-120"/>
+              </a:rPr>
+              <a:t>Why now? What's changed that makes this possible?</a:t>
+            </a:r>
+            <a:endParaRPr lang="en-US" sz="1800" dirty="0"/>
+          </a:p>
+          <a:p>
+            <a:pPr lvl="1" marL="685800" indent="-342900">
+              <a:lnSpc>
+                <a:spcPts val="2800"/>
+              </a:lnSpc>
+              <a:buSzPct val="100000"/>
+              <a:buChar char="•"/>
+            </a:pPr>
+            <a:r>
+              <a:rPr lang="en-US" sz="1800" dirty="0">
+                <a:solidFill>
+                  <a:srgbClr val="6B7280"/>
+                </a:solidFill>
+                <a:latin typeface="Calibri" pitchFamily="34" charset="0"/>
+                <a:ea typeface="Calibri" pitchFamily="34" charset="-122"/>
+                <a:cs typeface="Calibri" pitchFamily="34" charset="-120"/>
+              </a:rPr>
+              <a:t>Example: "AI has finally reached a point where it can understand context and automate complex decisions"</a:t>
+            </a:r>
+            <a:endParaRPr lang="en-US" sz="1800" dirty="0"/>
           </a:p>
           <a:p>
             <a:pPr marL="342900" indent="-342900">
@@ -2517,17 +2817,20 @@
               <a:buChar char="•"/>
             </a:pPr>
             <a:r>
-              <a:rPr lang="en-US" sz="1600" dirty="0">
-                <a:solidFill>
-                  <a:srgbClr val="374151"/>
-                </a:solidFill>
-              </a:rPr>
-              <a:t>Timeline to major milestones</a:t>
-            </a:r>
-            <a:endParaRPr lang="en-US" sz="1600" dirty="0"/>
-          </a:p>
-          <a:p>
-            <a:pPr marL="342900" indent="-342900">
+              <a:rPr lang="en-US" sz="1800" b="1" dirty="0">
+                <a:solidFill>
+                  <a:srgbClr val="1F2937"/>
+                </a:solidFill>
+                <a:latin typeface="Calibri" pitchFamily="34" charset="0"/>
+                <a:ea typeface="Calibri" pitchFamily="34" charset="-122"/>
+                <a:cs typeface="Calibri" pitchFamily="34" charset="-120"/>
+              </a:rPr>
+              <a:t>What's the category you're creating or redefining?</a:t>
+            </a:r>
+            <a:endParaRPr lang="en-US" sz="1800" dirty="0"/>
+          </a:p>
+          <a:p>
+            <a:pPr lvl="1" marL="685800" indent="-342900">
               <a:lnSpc>
                 <a:spcPts val="2800"/>
               </a:lnSpc>
@@ -2535,14 +2838,115 @@
               <a:buChar char="•"/>
             </a:pPr>
             <a:r>
-              <a:rPr lang="en-US" sz="1600" dirty="0">
-                <a:solidFill>
-                  <a:srgbClr val="374151"/>
-                </a:solidFill>
-              </a:rPr>
-              <a:t>Vision of partnership</a:t>
-            </a:r>
-            <a:endParaRPr lang="en-US" sz="1600" dirty="0"/>
+              <a:rPr lang="en-US" sz="1800" dirty="0">
+                <a:solidFill>
+                  <a:srgbClr val="6B7280"/>
+                </a:solidFill>
+                <a:latin typeface="Calibri" pitchFamily="34" charset="0"/>
+                <a:ea typeface="Calibri" pitchFamily="34" charset="-122"/>
+                <a:cs typeface="Calibri" pitchFamily="34" charset="-120"/>
+              </a:rPr>
+              <a:t>Example: "Intelligent financial operations for SMBs"</a:t>
+            </a:r>
+            <a:endParaRPr lang="en-US" sz="1800" dirty="0"/>
+          </a:p>
+        </p:txBody>
+      </p:sp>
+      <p:sp>
+        <p:nvSpPr>
+          <p:cNvPr id="6" name="Shape 4"/>
+          <p:cNvSpPr/>
+          <p:nvPr/>
+        </p:nvSpPr>
+        <p:spPr>
+          <a:xfrm>
+            <a:off x="0" y="6720840"/>
+            <a:ext cx="73152" cy="137160"/>
+          </a:xfrm>
+          <a:prstGeom prst="rect">
+            <a:avLst/>
+          </a:prstGeom>
+          <a:solidFill>
+            <a:srgbClr val="38BDF8"/>
+          </a:solidFill>
+          <a:ln/>
+        </p:spPr>
+      </p:sp>
+      <p:sp>
+        <p:nvSpPr>
+          <p:cNvPr id="7" name="Text 5"/>
+          <p:cNvSpPr/>
+          <p:nvPr/>
+        </p:nvSpPr>
+        <p:spPr>
+          <a:xfrm>
+            <a:off x="274320" y="6720840"/>
+            <a:ext cx="2743200" cy="137160"/>
+          </a:xfrm>
+          <a:prstGeom prst="rect">
+            <a:avLst/>
+          </a:prstGeom>
+          <a:noFill/>
+          <a:ln/>
+        </p:spPr>
+        <p:txBody>
+          <a:bodyPr wrap="square" rtlCol="0" anchor="ctr"/>
+          <a:lstStyle/>
+          <a:p>
+            <a:pPr indent="0" marL="0">
+              <a:buNone/>
+            </a:pPr>
+            <a:r>
+              <a:rPr lang="en-US" sz="1000" dirty="0">
+                <a:solidFill>
+                  <a:srgbClr val="6B7280"/>
+                </a:solidFill>
+                <a:latin typeface="Calibri" pitchFamily="34" charset="0"/>
+                <a:ea typeface="Calibri" pitchFamily="34" charset="-122"/>
+                <a:cs typeface="Calibri" pitchFamily="34" charset="-120"/>
+              </a:rPr>
+              <a:t>Creatives Takeover</a:t>
+            </a:r>
+            <a:endParaRPr lang="en-US" sz="1000" dirty="0"/>
+          </a:p>
+        </p:txBody>
+      </p:sp>
+      <p:sp>
+        <p:nvSpPr>
+          <p:cNvPr id="8" name="Text 6"/>
+          <p:cNvSpPr/>
+          <p:nvPr/>
+        </p:nvSpPr>
+        <p:spPr>
+          <a:xfrm>
+            <a:off x="8412480" y="6720840"/>
+            <a:ext cx="274320" cy="137160"/>
+          </a:xfrm>
+          <a:prstGeom prst="rect">
+            <a:avLst/>
+          </a:prstGeom>
+          <a:noFill/>
+          <a:ln/>
+        </p:spPr>
+        <p:txBody>
+          <a:bodyPr wrap="square" rtlCol="0" anchor="ctr"/>
+          <a:lstStyle/>
+          <a:p>
+            <a:pPr algn="r" indent="0" marL="0">
+              <a:buNone/>
+            </a:pPr>
+            <a:r>
+              <a:rPr lang="en-US" sz="1000" dirty="0">
+                <a:solidFill>
+                  <a:srgbClr val="6B7280"/>
+                </a:solidFill>
+                <a:latin typeface="Calibri" pitchFamily="34" charset="0"/>
+                <a:ea typeface="Calibri" pitchFamily="34" charset="-122"/>
+                <a:cs typeface="Calibri" pitchFamily="34" charset="-120"/>
+              </a:rPr>
+              <a:t>2</a:t>
+            </a:r>
+            <a:endParaRPr lang="en-US" sz="1000" dirty="0"/>
           </a:p>
         </p:txBody>
       </p:sp>
@@ -2554,9 +2958,16 @@
 </p:sld>
 </file>
 
-<file path=ppt/slides/slide2.xml><?xml version="1.0" encoding="utf-8"?>
+<file path=ppt/slides/slide3.xml><?xml version="1.0" encoding="utf-8"?>
 <p:sld xmlns:a="http://schemas.openxmlformats.org/drawingml/2006/main" xmlns:r="http://schemas.openxmlformats.org/officeDocument/2006/relationships" xmlns:p="http://schemas.openxmlformats.org/presentationml/2006/main">
-  <p:cSld name="Slide 2">
+  <p:cSld name="Slide 3">
+    <p:bg>
+      <p:bgPr>
+        <a:solidFill>
+          <a:srgbClr val="FFFFFF"/>
+        </a:solidFill>
+      </p:bgPr>
+    </p:bg>
     <p:spTree>
       <p:nvGrpSpPr>
         <p:cNvPr id="1" name=""/>
@@ -2573,14 +2984,34 @@
       </p:grpSpPr>
       <p:sp>
         <p:nvSpPr>
-          <p:cNvPr id="2" name="Text 0"/>
-          <p:cNvSpPr/>
-          <p:nvPr/>
-        </p:nvSpPr>
-        <p:spPr>
-          <a:xfrm>
-            <a:off x="457200" y="457200"/>
-            <a:ext cx="8229600" cy="685800"/>
+          <p:cNvPr id="2" name="Shape 0"/>
+          <p:cNvSpPr/>
+          <p:nvPr/>
+        </p:nvSpPr>
+        <p:spPr>
+          <a:xfrm>
+            <a:off x="0" y="0"/>
+            <a:ext cx="9144000" cy="137160"/>
+          </a:xfrm>
+          <a:prstGeom prst="rect">
+            <a:avLst/>
+          </a:prstGeom>
+          <a:solidFill>
+            <a:srgbClr val="0B1437"/>
+          </a:solidFill>
+          <a:ln/>
+        </p:spPr>
+      </p:sp>
+      <p:sp>
+        <p:nvSpPr>
+          <p:cNvPr id="3" name="Text 1"/>
+          <p:cNvSpPr/>
+          <p:nvPr/>
+        </p:nvSpPr>
+        <p:spPr>
+          <a:xfrm>
+            <a:off x="457200" y="365760"/>
+            <a:ext cx="8229600" cy="548640"/>
           </a:xfrm>
           <a:prstGeom prst="rect">
             <a:avLst/>
@@ -2600,8 +3031,11 @@
                 <a:solidFill>
                   <a:srgbClr val="0B1437"/>
                 </a:solidFill>
-              </a:rPr>
-              <a:t>Cover Slide</a:t>
+                <a:latin typeface="Calibri" pitchFamily="34" charset="0"/>
+                <a:ea typeface="Calibri" pitchFamily="34" charset="-122"/>
+                <a:cs typeface="Calibri" pitchFamily="34" charset="-120"/>
+              </a:rPr>
+              <a:t>The Massive Problem</a:t>
             </a:r>
             <a:endParaRPr lang="en-US" sz="3200" dirty="0"/>
           </a:p>
@@ -2609,7 +3043,46 @@
       </p:sp>
       <p:sp>
         <p:nvSpPr>
-          <p:cNvPr id="3" name="Text 1"/>
+          <p:cNvPr id="4" name="Text 2"/>
+          <p:cNvSpPr/>
+          <p:nvPr/>
+        </p:nvSpPr>
+        <p:spPr>
+          <a:xfrm>
+            <a:off x="457200" y="914400"/>
+            <a:ext cx="8229600" cy="365760"/>
+          </a:xfrm>
+          <a:prstGeom prst="rect">
+            <a:avLst/>
+          </a:prstGeom>
+          <a:noFill/>
+          <a:ln/>
+        </p:spPr>
+        <p:txBody>
+          <a:bodyPr wrap="square" rtlCol="0" anchor="ctr"/>
+          <a:lstStyle/>
+          <a:p>
+            <a:pPr indent="0" marL="0">
+              <a:buNone/>
+            </a:pPr>
+            <a:r>
+              <a:rPr lang="en-US" sz="1600" i="1" dirty="0">
+                <a:solidFill>
+                  <a:srgbClr val="6B7280"/>
+                </a:solidFill>
+                <a:latin typeface="Calibri" pitchFamily="34" charset="0"/>
+                <a:ea typeface="Calibri" pitchFamily="34" charset="-122"/>
+                <a:cs typeface="Calibri" pitchFamily="34" charset="-120"/>
+              </a:rPr>
+              <a:t>Why does this matter?</a:t>
+            </a:r>
+            <a:endParaRPr lang="en-US" sz="1600" dirty="0"/>
+          </a:p>
+        </p:txBody>
+      </p:sp>
+      <p:sp>
+        <p:nvSpPr>
+          <p:cNvPr id="5" name="Text 3"/>
           <p:cNvSpPr/>
           <p:nvPr/>
         </p:nvSpPr>
@@ -2636,14 +3109,38 @@
               <a:buChar char="•"/>
             </a:pPr>
             <a:r>
-              <a:rPr lang="en-US" sz="1600" dirty="0">
-                <a:solidFill>
-                  <a:srgbClr val="374151"/>
-                </a:solidFill>
-              </a:rPr>
-              <a:t>Company name</a:t>
-            </a:r>
-            <a:endParaRPr lang="en-US" sz="1600" dirty="0"/>
+              <a:rPr lang="en-US" sz="1800" b="1" dirty="0">
+                <a:solidFill>
+                  <a:srgbClr val="1F2937"/>
+                </a:solidFill>
+                <a:latin typeface="Calibri" pitchFamily="34" charset="0"/>
+                <a:ea typeface="Calibri" pitchFamily="34" charset="-122"/>
+                <a:cs typeface="Calibri" pitchFamily="34" charset="-120"/>
+              </a:rPr>
+              <a:t>Frame the problem at a systemic level</a:t>
+            </a:r>
+            <a:endParaRPr lang="en-US" sz="1800" dirty="0"/>
+          </a:p>
+          <a:p>
+            <a:pPr lvl="1" marL="685800" indent="-342900">
+              <a:lnSpc>
+                <a:spcPts val="2800"/>
+              </a:lnSpc>
+              <a:buSzPct val="100000"/>
+              <a:buChar char="•"/>
+            </a:pPr>
+            <a:r>
+              <a:rPr lang="en-US" sz="1800" dirty="0">
+                <a:solidFill>
+                  <a:srgbClr val="6B7280"/>
+                </a:solidFill>
+                <a:latin typeface="Calibri" pitchFamily="34" charset="0"/>
+                <a:ea typeface="Calibri" pitchFamily="34" charset="-122"/>
+                <a:cs typeface="Calibri" pitchFamily="34" charset="-120"/>
+              </a:rPr>
+              <a:t>Example: "Small businesses drive 50% of GDP but get 5% of fintech innovation"</a:t>
+            </a:r>
+            <a:endParaRPr lang="en-US" sz="1800" dirty="0"/>
           </a:p>
           <a:p>
             <a:pPr marL="342900" indent="-342900">
@@ -2654,14 +3151,38 @@
               <a:buChar char="•"/>
             </a:pPr>
             <a:r>
-              <a:rPr lang="en-US" sz="1600" dirty="0">
-                <a:solidFill>
-                  <a:srgbClr val="374151"/>
-                </a:solidFill>
-              </a:rPr>
-              <a:t>Bold tagline or mission</a:t>
-            </a:r>
-            <a:endParaRPr lang="en-US" sz="1600" dirty="0"/>
+              <a:rPr lang="en-US" sz="1800" b="1" dirty="0">
+                <a:solidFill>
+                  <a:srgbClr val="1F2937"/>
+                </a:solidFill>
+                <a:latin typeface="Calibri" pitchFamily="34" charset="0"/>
+                <a:ea typeface="Calibri" pitchFamily="34" charset="-122"/>
+                <a:cs typeface="Calibri" pitchFamily="34" charset="-120"/>
+              </a:rPr>
+              <a:t>Show the human impact</a:t>
+            </a:r>
+            <a:endParaRPr lang="en-US" sz="1800" dirty="0"/>
+          </a:p>
+          <a:p>
+            <a:pPr lvl="1" marL="685800" indent="-342900">
+              <a:lnSpc>
+                <a:spcPts val="2800"/>
+              </a:lnSpc>
+              <a:buSzPct val="100000"/>
+              <a:buChar char="•"/>
+            </a:pPr>
+            <a:r>
+              <a:rPr lang="en-US" sz="1800" dirty="0">
+                <a:solidFill>
+                  <a:srgbClr val="6B7280"/>
+                </a:solidFill>
+                <a:latin typeface="Calibri" pitchFamily="34" charset="0"/>
+                <a:ea typeface="Calibri" pitchFamily="34" charset="-122"/>
+                <a:cs typeface="Calibri" pitchFamily="34" charset="-120"/>
+              </a:rPr>
+              <a:t>Example: "30% of small businesses fail due to cash flow issues - most are preventable"</a:t>
+            </a:r>
+            <a:endParaRPr lang="en-US" sz="1800" dirty="0"/>
           </a:p>
           <a:p>
             <a:pPr marL="342900" indent="-342900">
@@ -2672,14 +3193,136 @@
               <a:buChar char="•"/>
             </a:pPr>
             <a:r>
-              <a:rPr lang="en-US" sz="1600" dirty="0">
-                <a:solidFill>
-                  <a:srgbClr val="374151"/>
-                </a:solidFill>
-              </a:rPr>
-              <a:t>Visually striking image</a:t>
-            </a:r>
-            <a:endParaRPr lang="en-US" sz="1600" dirty="0"/>
+              <a:rPr lang="en-US" sz="1800" b="1" dirty="0">
+                <a:solidFill>
+                  <a:srgbClr val="1F2937"/>
+                </a:solidFill>
+                <a:latin typeface="Calibri" pitchFamily="34" charset="0"/>
+                <a:ea typeface="Calibri" pitchFamily="34" charset="-122"/>
+                <a:cs typeface="Calibri" pitchFamily="34" charset="-120"/>
+              </a:rPr>
+              <a:t>Explain why existing solutions fail</a:t>
+            </a:r>
+            <a:endParaRPr lang="en-US" sz="1800" dirty="0"/>
+          </a:p>
+          <a:p>
+            <a:pPr lvl="1" marL="685800" indent="-342900">
+              <a:lnSpc>
+                <a:spcPts val="2800"/>
+              </a:lnSpc>
+              <a:buSzPct val="100000"/>
+              <a:buChar char="•"/>
+            </a:pPr>
+            <a:r>
+              <a:rPr lang="en-US" sz="1800" dirty="0">
+                <a:solidFill>
+                  <a:srgbClr val="6B7280"/>
+                </a:solidFill>
+                <a:latin typeface="Calibri" pitchFamily="34" charset="0"/>
+                <a:ea typeface="Calibri" pitchFamily="34" charset="-122"/>
+                <a:cs typeface="Calibri" pitchFamily="34" charset="-120"/>
+              </a:rPr>
+              <a:t>Example: "Enterprise tools are too complex; freelancer tools are too basic"</a:t>
+            </a:r>
+            <a:endParaRPr lang="en-US" sz="1800" dirty="0"/>
+          </a:p>
+        </p:txBody>
+      </p:sp>
+      <p:sp>
+        <p:nvSpPr>
+          <p:cNvPr id="6" name="Shape 4"/>
+          <p:cNvSpPr/>
+          <p:nvPr/>
+        </p:nvSpPr>
+        <p:spPr>
+          <a:xfrm>
+            <a:off x="0" y="6720840"/>
+            <a:ext cx="73152" cy="137160"/>
+          </a:xfrm>
+          <a:prstGeom prst="rect">
+            <a:avLst/>
+          </a:prstGeom>
+          <a:solidFill>
+            <a:srgbClr val="38BDF8"/>
+          </a:solidFill>
+          <a:ln/>
+        </p:spPr>
+      </p:sp>
+      <p:sp>
+        <p:nvSpPr>
+          <p:cNvPr id="7" name="Text 5"/>
+          <p:cNvSpPr/>
+          <p:nvPr/>
+        </p:nvSpPr>
+        <p:spPr>
+          <a:xfrm>
+            <a:off x="274320" y="6720840"/>
+            <a:ext cx="2743200" cy="137160"/>
+          </a:xfrm>
+          <a:prstGeom prst="rect">
+            <a:avLst/>
+          </a:prstGeom>
+          <a:noFill/>
+          <a:ln/>
+        </p:spPr>
+        <p:txBody>
+          <a:bodyPr wrap="square" rtlCol="0" anchor="ctr"/>
+          <a:lstStyle/>
+          <a:p>
+            <a:pPr indent="0" marL="0">
+              <a:buNone/>
+            </a:pPr>
+            <a:r>
+              <a:rPr lang="en-US" sz="1000" dirty="0">
+                <a:solidFill>
+                  <a:srgbClr val="6B7280"/>
+                </a:solidFill>
+                <a:latin typeface="Calibri" pitchFamily="34" charset="0"/>
+                <a:ea typeface="Calibri" pitchFamily="34" charset="-122"/>
+                <a:cs typeface="Calibri" pitchFamily="34" charset="-120"/>
+              </a:rPr>
+              <a:t>Creatives Takeover</a:t>
+            </a:r>
+            <a:endParaRPr lang="en-US" sz="1000" dirty="0"/>
+          </a:p>
+        </p:txBody>
+      </p:sp>
+      <p:sp>
+        <p:nvSpPr>
+          <p:cNvPr id="8" name="Text 6"/>
+          <p:cNvSpPr/>
+          <p:nvPr/>
+        </p:nvSpPr>
+        <p:spPr>
+          <a:xfrm>
+            <a:off x="8412480" y="6720840"/>
+            <a:ext cx="274320" cy="137160"/>
+          </a:xfrm>
+          <a:prstGeom prst="rect">
+            <a:avLst/>
+          </a:prstGeom>
+          <a:noFill/>
+          <a:ln/>
+        </p:spPr>
+        <p:txBody>
+          <a:bodyPr wrap="square" rtlCol="0" anchor="ctr"/>
+          <a:lstStyle/>
+          <a:p>
+            <a:pPr algn="r" indent="0" marL="0">
+              <a:buNone/>
+            </a:pPr>
+            <a:r>
+              <a:rPr lang="en-US" sz="1000" dirty="0">
+                <a:solidFill>
+                  <a:srgbClr val="6B7280"/>
+                </a:solidFill>
+                <a:latin typeface="Calibri" pitchFamily="34" charset="0"/>
+                <a:ea typeface="Calibri" pitchFamily="34" charset="-122"/>
+                <a:cs typeface="Calibri" pitchFamily="34" charset="-120"/>
+              </a:rPr>
+              <a:t>3</a:t>
+            </a:r>
+            <a:endParaRPr lang="en-US" sz="1000" dirty="0"/>
           </a:p>
         </p:txBody>
       </p:sp>
@@ -2691,9 +3334,16 @@
 </p:sld>
 </file>
 
-<file path=ppt/slides/slide3.xml><?xml version="1.0" encoding="utf-8"?>
+<file path=ppt/slides/slide4.xml><?xml version="1.0" encoding="utf-8"?>
 <p:sld xmlns:a="http://schemas.openxmlformats.org/drawingml/2006/main" xmlns:r="http://schemas.openxmlformats.org/officeDocument/2006/relationships" xmlns:p="http://schemas.openxmlformats.org/presentationml/2006/main">
-  <p:cSld name="Slide 3">
+  <p:cSld name="Slide 4">
+    <p:bg>
+      <p:bgPr>
+        <a:solidFill>
+          <a:srgbClr val="FFFFFF"/>
+        </a:solidFill>
+      </p:bgPr>
+    </p:bg>
     <p:spTree>
       <p:nvGrpSpPr>
         <p:cNvPr id="1" name=""/>
@@ -2710,14 +3360,34 @@
       </p:grpSpPr>
       <p:sp>
         <p:nvSpPr>
-          <p:cNvPr id="2" name="Text 0"/>
-          <p:cNvSpPr/>
-          <p:nvPr/>
-        </p:nvSpPr>
-        <p:spPr>
-          <a:xfrm>
-            <a:off x="457200" y="457200"/>
-            <a:ext cx="8229600" cy="685800"/>
+          <p:cNvPr id="2" name="Shape 0"/>
+          <p:cNvSpPr/>
+          <p:nvPr/>
+        </p:nvSpPr>
+        <p:spPr>
+          <a:xfrm>
+            <a:off x="0" y="0"/>
+            <a:ext cx="9144000" cy="137160"/>
+          </a:xfrm>
+          <a:prstGeom prst="rect">
+            <a:avLst/>
+          </a:prstGeom>
+          <a:solidFill>
+            <a:srgbClr val="0B1437"/>
+          </a:solidFill>
+          <a:ln/>
+        </p:spPr>
+      </p:sp>
+      <p:sp>
+        <p:nvSpPr>
+          <p:cNvPr id="3" name="Text 1"/>
+          <p:cNvSpPr/>
+          <p:nvPr/>
+        </p:nvSpPr>
+        <p:spPr>
+          <a:xfrm>
+            <a:off x="457200" y="365760"/>
+            <a:ext cx="8229600" cy="548640"/>
           </a:xfrm>
           <a:prstGeom prst="rect">
             <a:avLst/>
@@ -2737,8 +3407,11 @@
                 <a:solidFill>
                   <a:srgbClr val="0B1437"/>
                 </a:solidFill>
-              </a:rPr>
-              <a:t>The Vision</a:t>
+                <a:latin typeface="Calibri" pitchFamily="34" charset="0"/>
+                <a:ea typeface="Calibri" pitchFamily="34" charset="-122"/>
+                <a:cs typeface="Calibri" pitchFamily="34" charset="-120"/>
+              </a:rPr>
+              <a:t>The Breakthrough</a:t>
             </a:r>
             <a:endParaRPr lang="en-US" sz="3200" dirty="0"/>
           </a:p>
@@ -2746,7 +3419,46 @@
       </p:sp>
       <p:sp>
         <p:nvSpPr>
-          <p:cNvPr id="3" name="Text 1"/>
+          <p:cNvPr id="4" name="Text 2"/>
+          <p:cNvSpPr/>
+          <p:nvPr/>
+        </p:nvSpPr>
+        <p:spPr>
+          <a:xfrm>
+            <a:off x="457200" y="914400"/>
+            <a:ext cx="8229600" cy="365760"/>
+          </a:xfrm>
+          <a:prstGeom prst="rect">
+            <a:avLst/>
+          </a:prstGeom>
+          <a:noFill/>
+          <a:ln/>
+        </p:spPr>
+        <p:txBody>
+          <a:bodyPr wrap="square" rtlCol="0" anchor="ctr"/>
+          <a:lstStyle/>
+          <a:p>
+            <a:pPr indent="0" marL="0">
+              <a:buNone/>
+            </a:pPr>
+            <a:r>
+              <a:rPr lang="en-US" sz="1600" i="1" dirty="0">
+                <a:solidFill>
+                  <a:srgbClr val="6B7280"/>
+                </a:solidFill>
+                <a:latin typeface="Calibri" pitchFamily="34" charset="0"/>
+                <a:ea typeface="Calibri" pitchFamily="34" charset="-122"/>
+                <a:cs typeface="Calibri" pitchFamily="34" charset="-120"/>
+              </a:rPr>
+              <a:t>What's your unique insight?</a:t>
+            </a:r>
+            <a:endParaRPr lang="en-US" sz="1600" dirty="0"/>
+          </a:p>
+        </p:txBody>
+      </p:sp>
+      <p:sp>
+        <p:nvSpPr>
+          <p:cNvPr id="5" name="Text 3"/>
           <p:cNvSpPr/>
           <p:nvPr/>
         </p:nvSpPr>
@@ -2773,14 +3485,38 @@
               <a:buChar char="•"/>
             </a:pPr>
             <a:r>
-              <a:rPr lang="en-US" sz="1600" dirty="0">
-                <a:solidFill>
-                  <a:srgbClr val="374151"/>
-                </a:solidFill>
-              </a:rPr>
-              <a:t>Your vision for the world</a:t>
-            </a:r>
-            <a:endParaRPr lang="en-US" sz="1600" dirty="0"/>
+              <a:rPr lang="en-US" sz="1800" b="1" dirty="0">
+                <a:solidFill>
+                  <a:srgbClr val="1F2937"/>
+                </a:solidFill>
+                <a:latin typeface="Calibri" pitchFamily="34" charset="0"/>
+                <a:ea typeface="Calibri" pitchFamily="34" charset="-122"/>
+                <a:cs typeface="Calibri" pitchFamily="34" charset="-120"/>
+              </a:rPr>
+              <a:t>Describe your "unfair advantage" or unique approach</a:t>
+            </a:r>
+            <a:endParaRPr lang="en-US" sz="1800" dirty="0"/>
+          </a:p>
+          <a:p>
+            <a:pPr lvl="1" marL="685800" indent="-342900">
+              <a:lnSpc>
+                <a:spcPts val="2800"/>
+              </a:lnSpc>
+              <a:buSzPct val="100000"/>
+              <a:buChar char="•"/>
+            </a:pPr>
+            <a:r>
+              <a:rPr lang="en-US" sz="1800" dirty="0">
+                <a:solidFill>
+                  <a:srgbClr val="6B7280"/>
+                </a:solidFill>
+                <a:latin typeface="Calibri" pitchFamily="34" charset="0"/>
+                <a:ea typeface="Calibri" pitchFamily="34" charset="-122"/>
+                <a:cs typeface="Calibri" pitchFamily="34" charset="-120"/>
+              </a:rPr>
+              <a:t>Example: "We're the first to apply GPT-4 to small business accounting workflows"</a:t>
+            </a:r>
+            <a:endParaRPr lang="en-US" sz="1800" dirty="0"/>
           </a:p>
           <a:p>
             <a:pPr marL="342900" indent="-342900">
@@ -2791,14 +3527,38 @@
               <a:buChar char="•"/>
             </a:pPr>
             <a:r>
-              <a:rPr lang="en-US" sz="1600" dirty="0">
-                <a:solidFill>
-                  <a:srgbClr val="374151"/>
-                </a:solidFill>
-              </a:rPr>
-              <a:t>What changes when you succeed</a:t>
-            </a:r>
-            <a:endParaRPr lang="en-US" sz="1600" dirty="0"/>
+              <a:rPr lang="en-US" sz="1800" b="1" dirty="0">
+                <a:solidFill>
+                  <a:srgbClr val="1F2937"/>
+                </a:solidFill>
+                <a:latin typeface="Calibri" pitchFamily="34" charset="0"/>
+                <a:ea typeface="Calibri" pitchFamily="34" charset="-122"/>
+                <a:cs typeface="Calibri" pitchFamily="34" charset="-120"/>
+              </a:rPr>
+              <a:t>Explain the technology or innovation</a:t>
+            </a:r>
+            <a:endParaRPr lang="en-US" sz="1800" dirty="0"/>
+          </a:p>
+          <a:p>
+            <a:pPr lvl="1" marL="685800" indent="-342900">
+              <a:lnSpc>
+                <a:spcPts val="2800"/>
+              </a:lnSpc>
+              <a:buSzPct val="100000"/>
+              <a:buChar char="•"/>
+            </a:pPr>
+            <a:r>
+              <a:rPr lang="en-US" sz="1800" dirty="0">
+                <a:solidFill>
+                  <a:srgbClr val="6B7280"/>
+                </a:solidFill>
+                <a:latin typeface="Calibri" pitchFamily="34" charset="0"/>
+                <a:ea typeface="Calibri" pitchFamily="34" charset="-122"/>
+                <a:cs typeface="Calibri" pitchFamily="34" charset="-120"/>
+              </a:rPr>
+              <a:t>Example: "Our AI learns from millions of transactions to predict cash flow with 95% accuracy"</a:t>
+            </a:r>
+            <a:endParaRPr lang="en-US" sz="1800" dirty="0"/>
           </a:p>
           <a:p>
             <a:pPr marL="342900" indent="-342900">
@@ -2809,17 +3569,20 @@
               <a:buChar char="•"/>
             </a:pPr>
             <a:r>
-              <a:rPr lang="en-US" sz="1600" dirty="0">
-                <a:solidFill>
-                  <a:srgbClr val="374151"/>
-                </a:solidFill>
-              </a:rPr>
-              <a:t>The transformation you enable</a:t>
-            </a:r>
-            <a:endParaRPr lang="en-US" sz="1600" dirty="0"/>
-          </a:p>
-          <a:p>
-            <a:pPr marL="342900" indent="-342900">
+              <a:rPr lang="en-US" sz="1800" b="1" dirty="0">
+                <a:solidFill>
+                  <a:srgbClr val="1F2937"/>
+                </a:solidFill>
+                <a:latin typeface="Calibri" pitchFamily="34" charset="0"/>
+                <a:ea typeface="Calibri" pitchFamily="34" charset="-122"/>
+                <a:cs typeface="Calibri" pitchFamily="34" charset="-120"/>
+              </a:rPr>
+              <a:t>Why is this a 10x improvement, not 10%?</a:t>
+            </a:r>
+            <a:endParaRPr lang="en-US" sz="1800" dirty="0"/>
+          </a:p>
+          <a:p>
+            <a:pPr lvl="1" marL="685800" indent="-342900">
               <a:lnSpc>
                 <a:spcPts val="2800"/>
               </a:lnSpc>
@@ -2827,14 +3590,115 @@
               <a:buChar char="•"/>
             </a:pPr>
             <a:r>
-              <a:rPr lang="en-US" sz="1600" dirty="0">
-                <a:solidFill>
-                  <a:srgbClr val="374151"/>
-                </a:solidFill>
-              </a:rPr>
-              <a:t>Think 10-20 years out</a:t>
-            </a:r>
-            <a:endParaRPr lang="en-US" sz="1600" dirty="0"/>
+              <a:rPr lang="en-US" sz="1800" dirty="0">
+                <a:solidFill>
+                  <a:srgbClr val="6B7280"/>
+                </a:solidFill>
+                <a:latin typeface="Calibri" pitchFamily="34" charset="0"/>
+                <a:ea typeface="Calibri" pitchFamily="34" charset="-122"/>
+                <a:cs typeface="Calibri" pitchFamily="34" charset="-120"/>
+              </a:rPr>
+              <a:t>Example: "Reduces time spent on financial admin from 20 hours/week to 2 hours/week"</a:t>
+            </a:r>
+            <a:endParaRPr lang="en-US" sz="1800" dirty="0"/>
+          </a:p>
+        </p:txBody>
+      </p:sp>
+      <p:sp>
+        <p:nvSpPr>
+          <p:cNvPr id="6" name="Shape 4"/>
+          <p:cNvSpPr/>
+          <p:nvPr/>
+        </p:nvSpPr>
+        <p:spPr>
+          <a:xfrm>
+            <a:off x="0" y="6720840"/>
+            <a:ext cx="73152" cy="137160"/>
+          </a:xfrm>
+          <a:prstGeom prst="rect">
+            <a:avLst/>
+          </a:prstGeom>
+          <a:solidFill>
+            <a:srgbClr val="38BDF8"/>
+          </a:solidFill>
+          <a:ln/>
+        </p:spPr>
+      </p:sp>
+      <p:sp>
+        <p:nvSpPr>
+          <p:cNvPr id="7" name="Text 5"/>
+          <p:cNvSpPr/>
+          <p:nvPr/>
+        </p:nvSpPr>
+        <p:spPr>
+          <a:xfrm>
+            <a:off x="274320" y="6720840"/>
+            <a:ext cx="2743200" cy="137160"/>
+          </a:xfrm>
+          <a:prstGeom prst="rect">
+            <a:avLst/>
+          </a:prstGeom>
+          <a:noFill/>
+          <a:ln/>
+        </p:spPr>
+        <p:txBody>
+          <a:bodyPr wrap="square" rtlCol="0" anchor="ctr"/>
+          <a:lstStyle/>
+          <a:p>
+            <a:pPr indent="0" marL="0">
+              <a:buNone/>
+            </a:pPr>
+            <a:r>
+              <a:rPr lang="en-US" sz="1000" dirty="0">
+                <a:solidFill>
+                  <a:srgbClr val="6B7280"/>
+                </a:solidFill>
+                <a:latin typeface="Calibri" pitchFamily="34" charset="0"/>
+                <a:ea typeface="Calibri" pitchFamily="34" charset="-122"/>
+                <a:cs typeface="Calibri" pitchFamily="34" charset="-120"/>
+              </a:rPr>
+              <a:t>Creatives Takeover</a:t>
+            </a:r>
+            <a:endParaRPr lang="en-US" sz="1000" dirty="0"/>
+          </a:p>
+        </p:txBody>
+      </p:sp>
+      <p:sp>
+        <p:nvSpPr>
+          <p:cNvPr id="8" name="Text 6"/>
+          <p:cNvSpPr/>
+          <p:nvPr/>
+        </p:nvSpPr>
+        <p:spPr>
+          <a:xfrm>
+            <a:off x="8412480" y="6720840"/>
+            <a:ext cx="274320" cy="137160"/>
+          </a:xfrm>
+          <a:prstGeom prst="rect">
+            <a:avLst/>
+          </a:prstGeom>
+          <a:noFill/>
+          <a:ln/>
+        </p:spPr>
+        <p:txBody>
+          <a:bodyPr wrap="square" rtlCol="0" anchor="ctr"/>
+          <a:lstStyle/>
+          <a:p>
+            <a:pPr algn="r" indent="0" marL="0">
+              <a:buNone/>
+            </a:pPr>
+            <a:r>
+              <a:rPr lang="en-US" sz="1000" dirty="0">
+                <a:solidFill>
+                  <a:srgbClr val="6B7280"/>
+                </a:solidFill>
+                <a:latin typeface="Calibri" pitchFamily="34" charset="0"/>
+                <a:ea typeface="Calibri" pitchFamily="34" charset="-122"/>
+                <a:cs typeface="Calibri" pitchFamily="34" charset="-120"/>
+              </a:rPr>
+              <a:t>4</a:t>
+            </a:r>
+            <a:endParaRPr lang="en-US" sz="1000" dirty="0"/>
           </a:p>
         </p:txBody>
       </p:sp>
@@ -2846,9 +3710,16 @@
 </p:sld>
 </file>
 
-<file path=ppt/slides/slide4.xml><?xml version="1.0" encoding="utf-8"?>
+<file path=ppt/slides/slide5.xml><?xml version="1.0" encoding="utf-8"?>
 <p:sld xmlns:a="http://schemas.openxmlformats.org/drawingml/2006/main" xmlns:r="http://schemas.openxmlformats.org/officeDocument/2006/relationships" xmlns:p="http://schemas.openxmlformats.org/presentationml/2006/main">
-  <p:cSld name="Slide 4">
+  <p:cSld name="Slide 5">
+    <p:bg>
+      <p:bgPr>
+        <a:solidFill>
+          <a:srgbClr val="FFFFFF"/>
+        </a:solidFill>
+      </p:bgPr>
+    </p:bg>
     <p:spTree>
       <p:nvGrpSpPr>
         <p:cNvPr id="1" name=""/>
@@ -2865,14 +3736,34 @@
       </p:grpSpPr>
       <p:sp>
         <p:nvSpPr>
-          <p:cNvPr id="2" name="Text 0"/>
-          <p:cNvSpPr/>
-          <p:nvPr/>
-        </p:nvSpPr>
-        <p:spPr>
-          <a:xfrm>
-            <a:off x="457200" y="457200"/>
-            <a:ext cx="8229600" cy="685800"/>
+          <p:cNvPr id="2" name="Shape 0"/>
+          <p:cNvSpPr/>
+          <p:nvPr/>
+        </p:nvSpPr>
+        <p:spPr>
+          <a:xfrm>
+            <a:off x="0" y="0"/>
+            <a:ext cx="9144000" cy="137160"/>
+          </a:xfrm>
+          <a:prstGeom prst="rect">
+            <a:avLst/>
+          </a:prstGeom>
+          <a:solidFill>
+            <a:srgbClr val="0B1437"/>
+          </a:solidFill>
+          <a:ln/>
+        </p:spPr>
+      </p:sp>
+      <p:sp>
+        <p:nvSpPr>
+          <p:cNvPr id="3" name="Text 1"/>
+          <p:cNvSpPr/>
+          <p:nvPr/>
+        </p:nvSpPr>
+        <p:spPr>
+          <a:xfrm>
+            <a:off x="457200" y="365760"/>
+            <a:ext cx="8229600" cy="548640"/>
           </a:xfrm>
           <a:prstGeom prst="rect">
             <a:avLst/>
@@ -2892,8 +3783,11 @@
                 <a:solidFill>
                   <a:srgbClr val="0B1437"/>
                 </a:solidFill>
-              </a:rPr>
-              <a:t>The Problem</a:t>
+                <a:latin typeface="Calibri" pitchFamily="34" charset="0"/>
+                <a:ea typeface="Calibri" pitchFamily="34" charset="-122"/>
+                <a:cs typeface="Calibri" pitchFamily="34" charset="-120"/>
+              </a:rPr>
+              <a:t>Product Vision</a:t>
             </a:r>
             <a:endParaRPr lang="en-US" sz="3200" dirty="0"/>
           </a:p>
@@ -2901,7 +3795,46 @@
       </p:sp>
       <p:sp>
         <p:nvSpPr>
-          <p:cNvPr id="3" name="Text 1"/>
+          <p:cNvPr id="4" name="Text 2"/>
+          <p:cNvSpPr/>
+          <p:nvPr/>
+        </p:nvSpPr>
+        <p:spPr>
+          <a:xfrm>
+            <a:off x="457200" y="914400"/>
+            <a:ext cx="8229600" cy="365760"/>
+          </a:xfrm>
+          <a:prstGeom prst="rect">
+            <a:avLst/>
+          </a:prstGeom>
+          <a:noFill/>
+          <a:ln/>
+        </p:spPr>
+        <p:txBody>
+          <a:bodyPr wrap="square" rtlCol="0" anchor="ctr"/>
+          <a:lstStyle/>
+          <a:p>
+            <a:pPr indent="0" marL="0">
+              <a:buNone/>
+            </a:pPr>
+            <a:r>
+              <a:rPr lang="en-US" sz="1600" i="1" dirty="0">
+                <a:solidFill>
+                  <a:srgbClr val="6B7280"/>
+                </a:solidFill>
+                <a:latin typeface="Calibri" pitchFamily="34" charset="0"/>
+                <a:ea typeface="Calibri" pitchFamily="34" charset="-122"/>
+                <a:cs typeface="Calibri" pitchFamily="34" charset="-120"/>
+              </a:rPr>
+              <a:t>Show the future product</a:t>
+            </a:r>
+            <a:endParaRPr lang="en-US" sz="1600" dirty="0"/>
+          </a:p>
+        </p:txBody>
+      </p:sp>
+      <p:sp>
+        <p:nvSpPr>
+          <p:cNvPr id="5" name="Text 3"/>
           <p:cNvSpPr/>
           <p:nvPr/>
         </p:nvSpPr>
@@ -2928,14 +3861,17 @@
               <a:buChar char="•"/>
             </a:pPr>
             <a:r>
-              <a:rPr lang="en-US" sz="1600" dirty="0">
-                <a:solidFill>
-                  <a:srgbClr val="374151"/>
-                </a:solidFill>
-              </a:rPr>
-              <a:t>What's broken today</a:t>
-            </a:r>
-            <a:endParaRPr lang="en-US" sz="1600" dirty="0"/>
+              <a:rPr lang="en-US" sz="1800" b="1" dirty="0">
+                <a:solidFill>
+                  <a:srgbClr val="1F2937"/>
+                </a:solidFill>
+                <a:latin typeface="Calibri" pitchFamily="34" charset="0"/>
+                <a:ea typeface="Calibri" pitchFamily="34" charset="-122"/>
+                <a:cs typeface="Calibri" pitchFamily="34" charset="-120"/>
+              </a:rPr>
+              <a:t>Include futuristic mockups or product vision video</a:t>
+            </a:r>
+            <a:endParaRPr lang="en-US" sz="1800" dirty="0"/>
           </a:p>
           <a:p>
             <a:pPr marL="342900" indent="-342900">
@@ -2946,14 +3882,80 @@
               <a:buChar char="•"/>
             </a:pPr>
             <a:r>
-              <a:rPr lang="en-US" sz="1600" dirty="0">
-                <a:solidFill>
-                  <a:srgbClr val="374151"/>
-                </a:solidFill>
-              </a:rPr>
-              <a:t>Why current solutions fail</a:t>
-            </a:r>
-            <a:endParaRPr lang="en-US" sz="1600" dirty="0"/>
+              <a:rPr lang="en-US" sz="1800" b="1" dirty="0">
+                <a:solidFill>
+                  <a:srgbClr val="1F2937"/>
+                </a:solidFill>
+                <a:latin typeface="Calibri" pitchFamily="34" charset="0"/>
+                <a:ea typeface="Calibri" pitchFamily="34" charset="-122"/>
+                <a:cs typeface="Calibri" pitchFamily="34" charset="-120"/>
+              </a:rPr>
+              <a:t>Show the long-term roadmap (3-5 year vision)</a:t>
+            </a:r>
+            <a:endParaRPr lang="en-US" sz="1800" dirty="0"/>
+          </a:p>
+          <a:p>
+            <a:pPr lvl="1" marL="685800" indent="-342900">
+              <a:lnSpc>
+                <a:spcPts val="2800"/>
+              </a:lnSpc>
+              <a:buSzPct val="100000"/>
+              <a:buChar char="•"/>
+            </a:pPr>
+            <a:r>
+              <a:rPr lang="en-US" sz="1800" dirty="0">
+                <a:solidFill>
+                  <a:srgbClr val="6B7280"/>
+                </a:solidFill>
+                <a:latin typeface="Calibri" pitchFamily="34" charset="0"/>
+                <a:ea typeface="Calibri" pitchFamily="34" charset="-122"/>
+                <a:cs typeface="Calibri" pitchFamily="34" charset="-120"/>
+              </a:rPr>
+              <a:t>Year 1: Automated invoicing and payments</a:t>
+            </a:r>
+            <a:endParaRPr lang="en-US" sz="1800" dirty="0"/>
+          </a:p>
+          <a:p>
+            <a:pPr lvl="1" marL="685800" indent="-342900">
+              <a:lnSpc>
+                <a:spcPts val="2800"/>
+              </a:lnSpc>
+              <a:buSzPct val="100000"/>
+              <a:buChar char="•"/>
+            </a:pPr>
+            <a:r>
+              <a:rPr lang="en-US" sz="1800" dirty="0">
+                <a:solidFill>
+                  <a:srgbClr val="6B7280"/>
+                </a:solidFill>
+                <a:latin typeface="Calibri" pitchFamily="34" charset="0"/>
+                <a:ea typeface="Calibri" pitchFamily="34" charset="-122"/>
+                <a:cs typeface="Calibri" pitchFamily="34" charset="-120"/>
+              </a:rPr>
+              <a:t>Year 2: AI-powered financial forecasting</a:t>
+            </a:r>
+            <a:endParaRPr lang="en-US" sz="1800" dirty="0"/>
+          </a:p>
+          <a:p>
+            <a:pPr lvl="1" marL="685800" indent="-342900">
+              <a:lnSpc>
+                <a:spcPts val="2800"/>
+              </a:lnSpc>
+              <a:buSzPct val="100000"/>
+              <a:buChar char="•"/>
+            </a:pPr>
+            <a:r>
+              <a:rPr lang="en-US" sz="1800" dirty="0">
+                <a:solidFill>
+                  <a:srgbClr val="6B7280"/>
+                </a:solidFill>
+                <a:latin typeface="Calibri" pitchFamily="34" charset="0"/>
+                <a:ea typeface="Calibri" pitchFamily="34" charset="-122"/>
+                <a:cs typeface="Calibri" pitchFamily="34" charset="-120"/>
+              </a:rPr>
+              <a:t>Year 3: Full autonomous financial operations platform</a:t>
+            </a:r>
+            <a:endParaRPr lang="en-US" sz="1800" dirty="0"/>
           </a:p>
           <a:p>
             <a:pPr marL="342900" indent="-342900">
@@ -2964,14 +3966,115 @@
               <a:buChar char="•"/>
             </a:pPr>
             <a:r>
-              <a:rPr lang="en-US" sz="1600" dirty="0">
-                <a:solidFill>
-                  <a:srgbClr val="374151"/>
-                </a:solidFill>
-              </a:rPr>
-              <a:t>Urgency of the problem</a:t>
-            </a:r>
-            <a:endParaRPr lang="en-US" sz="1600" dirty="0"/>
+              <a:rPr lang="en-US" sz="1800" b="1" dirty="0">
+                <a:solidFill>
+                  <a:srgbClr val="1F2937"/>
+                </a:solidFill>
+                <a:latin typeface="Calibri" pitchFamily="34" charset="0"/>
+                <a:ea typeface="Calibri" pitchFamily="34" charset="-122"/>
+                <a:cs typeface="Calibri" pitchFamily="34" charset="-120"/>
+              </a:rPr>
+              <a:t>Demonstrate the platform effect or ecosystem</a:t>
+            </a:r>
+            <a:endParaRPr lang="en-US" sz="1800" dirty="0"/>
+          </a:p>
+        </p:txBody>
+      </p:sp>
+      <p:sp>
+        <p:nvSpPr>
+          <p:cNvPr id="6" name="Shape 4"/>
+          <p:cNvSpPr/>
+          <p:nvPr/>
+        </p:nvSpPr>
+        <p:spPr>
+          <a:xfrm>
+            <a:off x="0" y="6720840"/>
+            <a:ext cx="73152" cy="137160"/>
+          </a:xfrm>
+          <a:prstGeom prst="rect">
+            <a:avLst/>
+          </a:prstGeom>
+          <a:solidFill>
+            <a:srgbClr val="38BDF8"/>
+          </a:solidFill>
+          <a:ln/>
+        </p:spPr>
+      </p:sp>
+      <p:sp>
+        <p:nvSpPr>
+          <p:cNvPr id="7" name="Text 5"/>
+          <p:cNvSpPr/>
+          <p:nvPr/>
+        </p:nvSpPr>
+        <p:spPr>
+          <a:xfrm>
+            <a:off x="274320" y="6720840"/>
+            <a:ext cx="2743200" cy="137160"/>
+          </a:xfrm>
+          <a:prstGeom prst="rect">
+            <a:avLst/>
+          </a:prstGeom>
+          <a:noFill/>
+          <a:ln/>
+        </p:spPr>
+        <p:txBody>
+          <a:bodyPr wrap="square" rtlCol="0" anchor="ctr"/>
+          <a:lstStyle/>
+          <a:p>
+            <a:pPr indent="0" marL="0">
+              <a:buNone/>
+            </a:pPr>
+            <a:r>
+              <a:rPr lang="en-US" sz="1000" dirty="0">
+                <a:solidFill>
+                  <a:srgbClr val="6B7280"/>
+                </a:solidFill>
+                <a:latin typeface="Calibri" pitchFamily="34" charset="0"/>
+                <a:ea typeface="Calibri" pitchFamily="34" charset="-122"/>
+                <a:cs typeface="Calibri" pitchFamily="34" charset="-120"/>
+              </a:rPr>
+              <a:t>Creatives Takeover</a:t>
+            </a:r>
+            <a:endParaRPr lang="en-US" sz="1000" dirty="0"/>
+          </a:p>
+        </p:txBody>
+      </p:sp>
+      <p:sp>
+        <p:nvSpPr>
+          <p:cNvPr id="8" name="Text 6"/>
+          <p:cNvSpPr/>
+          <p:nvPr/>
+        </p:nvSpPr>
+        <p:spPr>
+          <a:xfrm>
+            <a:off x="8412480" y="6720840"/>
+            <a:ext cx="274320" cy="137160"/>
+          </a:xfrm>
+          <a:prstGeom prst="rect">
+            <a:avLst/>
+          </a:prstGeom>
+          <a:noFill/>
+          <a:ln/>
+        </p:spPr>
+        <p:txBody>
+          <a:bodyPr wrap="square" rtlCol="0" anchor="ctr"/>
+          <a:lstStyle/>
+          <a:p>
+            <a:pPr algn="r" indent="0" marL="0">
+              <a:buNone/>
+            </a:pPr>
+            <a:r>
+              <a:rPr lang="en-US" sz="1000" dirty="0">
+                <a:solidFill>
+                  <a:srgbClr val="6B7280"/>
+                </a:solidFill>
+                <a:latin typeface="Calibri" pitchFamily="34" charset="0"/>
+                <a:ea typeface="Calibri" pitchFamily="34" charset="-122"/>
+                <a:cs typeface="Calibri" pitchFamily="34" charset="-120"/>
+              </a:rPr>
+              <a:t>5</a:t>
+            </a:r>
+            <a:endParaRPr lang="en-US" sz="1000" dirty="0"/>
           </a:p>
         </p:txBody>
       </p:sp>
@@ -2983,9 +4086,16 @@
 </p:sld>
 </file>
 
-<file path=ppt/slides/slide5.xml><?xml version="1.0" encoding="utf-8"?>
+<file path=ppt/slides/slide6.xml><?xml version="1.0" encoding="utf-8"?>
 <p:sld xmlns:a="http://schemas.openxmlformats.org/drawingml/2006/main" xmlns:r="http://schemas.openxmlformats.org/officeDocument/2006/relationships" xmlns:p="http://schemas.openxmlformats.org/presentationml/2006/main">
-  <p:cSld name="Slide 5">
+  <p:cSld name="Slide 6">
+    <p:bg>
+      <p:bgPr>
+        <a:solidFill>
+          <a:srgbClr val="FFFFFF"/>
+        </a:solidFill>
+      </p:bgPr>
+    </p:bg>
     <p:spTree>
       <p:nvGrpSpPr>
         <p:cNvPr id="1" name=""/>
@@ -3002,14 +4112,34 @@
       </p:grpSpPr>
       <p:sp>
         <p:nvSpPr>
-          <p:cNvPr id="2" name="Text 0"/>
-          <p:cNvSpPr/>
-          <p:nvPr/>
-        </p:nvSpPr>
-        <p:spPr>
-          <a:xfrm>
-            <a:off x="457200" y="457200"/>
-            <a:ext cx="8229600" cy="685800"/>
+          <p:cNvPr id="2" name="Shape 0"/>
+          <p:cNvSpPr/>
+          <p:nvPr/>
+        </p:nvSpPr>
+        <p:spPr>
+          <a:xfrm>
+            <a:off x="0" y="0"/>
+            <a:ext cx="9144000" cy="137160"/>
+          </a:xfrm>
+          <a:prstGeom prst="rect">
+            <a:avLst/>
+          </a:prstGeom>
+          <a:solidFill>
+            <a:srgbClr val="0B1437"/>
+          </a:solidFill>
+          <a:ln/>
+        </p:spPr>
+      </p:sp>
+      <p:sp>
+        <p:nvSpPr>
+          <p:cNvPr id="3" name="Text 1"/>
+          <p:cNvSpPr/>
+          <p:nvPr/>
+        </p:nvSpPr>
+        <p:spPr>
+          <a:xfrm>
+            <a:off x="457200" y="365760"/>
+            <a:ext cx="8229600" cy="548640"/>
           </a:xfrm>
           <a:prstGeom prst="rect">
             <a:avLst/>
@@ -3029,8 +4159,11 @@
                 <a:solidFill>
                   <a:srgbClr val="0B1437"/>
                 </a:solidFill>
-              </a:rPr>
-              <a:t>Why Now</a:t>
+                <a:latin typeface="Calibri" pitchFamily="34" charset="0"/>
+                <a:ea typeface="Calibri" pitchFamily="34" charset="-122"/>
+                <a:cs typeface="Calibri" pitchFamily="34" charset="-120"/>
+              </a:rPr>
+              <a:t>Market Timing</a:t>
             </a:r>
             <a:endParaRPr lang="en-US" sz="3200" dirty="0"/>
           </a:p>
@@ -3038,7 +4171,46 @@
       </p:sp>
       <p:sp>
         <p:nvSpPr>
-          <p:cNvPr id="3" name="Text 1"/>
+          <p:cNvPr id="4" name="Text 2"/>
+          <p:cNvSpPr/>
+          <p:nvPr/>
+        </p:nvSpPr>
+        <p:spPr>
+          <a:xfrm>
+            <a:off x="457200" y="914400"/>
+            <a:ext cx="8229600" cy="365760"/>
+          </a:xfrm>
+          <a:prstGeom prst="rect">
+            <a:avLst/>
+          </a:prstGeom>
+          <a:noFill/>
+          <a:ln/>
+        </p:spPr>
+        <p:txBody>
+          <a:bodyPr wrap="square" rtlCol="0" anchor="ctr"/>
+          <a:lstStyle/>
+          <a:p>
+            <a:pPr indent="0" marL="0">
+              <a:buNone/>
+            </a:pPr>
+            <a:r>
+              <a:rPr lang="en-US" sz="1600" i="1" dirty="0">
+                <a:solidFill>
+                  <a:srgbClr val="6B7280"/>
+                </a:solidFill>
+                <a:latin typeface="Calibri" pitchFamily="34" charset="0"/>
+                <a:ea typeface="Calibri" pitchFamily="34" charset="-122"/>
+                <a:cs typeface="Calibri" pitchFamily="34" charset="-120"/>
+              </a:rPr>
+              <a:t>Why now?</a:t>
+            </a:r>
+            <a:endParaRPr lang="en-US" sz="1600" dirty="0"/>
+          </a:p>
+        </p:txBody>
+      </p:sp>
+      <p:sp>
+        <p:nvSpPr>
+          <p:cNvPr id="5" name="Text 3"/>
           <p:cNvSpPr/>
           <p:nvPr/>
         </p:nvSpPr>
@@ -3065,14 +4237,17 @@
               <a:buChar char="•"/>
             </a:pPr>
             <a:r>
-              <a:rPr lang="en-US" sz="1600" dirty="0">
-                <a:solidFill>
-                  <a:srgbClr val="374151"/>
-                </a:solidFill>
-              </a:rPr>
-              <a:t>Technology enablers</a:t>
-            </a:r>
-            <a:endParaRPr lang="en-US" sz="1600" dirty="0"/>
+              <a:rPr lang="en-US" sz="1800" b="1" dirty="0">
+                <a:solidFill>
+                  <a:srgbClr val="1F2937"/>
+                </a:solidFill>
+                <a:latin typeface="Calibri" pitchFamily="34" charset="0"/>
+                <a:ea typeface="Calibri" pitchFamily="34" charset="-122"/>
+                <a:cs typeface="Calibri" pitchFamily="34" charset="-120"/>
+              </a:rPr>
+              <a:t>AI models reached production-ready quality in 2023</a:t>
+            </a:r>
+            <a:endParaRPr lang="en-US" sz="1800" dirty="0"/>
           </a:p>
           <a:p>
             <a:pPr marL="342900" indent="-342900">
@@ -3083,14 +4258,38 @@
               <a:buChar char="•"/>
             </a:pPr>
             <a:r>
-              <a:rPr lang="en-US" sz="1600" dirty="0">
-                <a:solidFill>
-                  <a:srgbClr val="374151"/>
-                </a:solidFill>
-              </a:rPr>
-              <a:t>Market shifts</a:t>
-            </a:r>
-            <a:endParaRPr lang="en-US" sz="1600" dirty="0"/>
+              <a:rPr lang="en-US" sz="1800" b="1" dirty="0">
+                <a:solidFill>
+                  <a:srgbClr val="1F2937"/>
+                </a:solidFill>
+                <a:latin typeface="Calibri" pitchFamily="34" charset="0"/>
+                <a:ea typeface="Calibri" pitchFamily="34" charset="-122"/>
+                <a:cs typeface="Calibri" pitchFamily="34" charset="-120"/>
+              </a:rPr>
+              <a:t>Small business adoption of cloud tools accelerated post-COVID</a:t>
+            </a:r>
+            <a:endParaRPr lang="en-US" sz="1800" dirty="0"/>
+          </a:p>
+          <a:p>
+            <a:pPr lvl="1" marL="685800" indent="-342900">
+              <a:lnSpc>
+                <a:spcPts val="2800"/>
+              </a:lnSpc>
+              <a:buSzPct val="100000"/>
+              <a:buChar char="•"/>
+            </a:pPr>
+            <a:r>
+              <a:rPr lang="en-US" sz="1800" dirty="0">
+                <a:solidFill>
+                  <a:srgbClr val="6B7280"/>
+                </a:solidFill>
+                <a:latin typeface="Calibri" pitchFamily="34" charset="0"/>
+                <a:ea typeface="Calibri" pitchFamily="34" charset="-122"/>
+                <a:cs typeface="Calibri" pitchFamily="34" charset="-120"/>
+              </a:rPr>
+              <a:t>Example: "70% of SMBs now use cloud-based tools vs 40% in 2019"</a:t>
+            </a:r>
+            <a:endParaRPr lang="en-US" sz="1800" dirty="0"/>
           </a:p>
           <a:p>
             <a:pPr marL="342900" indent="-342900">
@@ -3101,14 +4300,17 @@
               <a:buChar char="•"/>
             </a:pPr>
             <a:r>
-              <a:rPr lang="en-US" sz="1600" dirty="0">
-                <a:solidFill>
-                  <a:srgbClr val="374151"/>
-                </a:solidFill>
-              </a:rPr>
-              <a:t>Regulatory changes</a:t>
-            </a:r>
-            <a:endParaRPr lang="en-US" sz="1600" dirty="0"/>
+              <a:rPr lang="en-US" sz="1800" b="1" dirty="0">
+                <a:solidFill>
+                  <a:srgbClr val="1F2937"/>
+                </a:solidFill>
+                <a:latin typeface="Calibri" pitchFamily="34" charset="0"/>
+                <a:ea typeface="Calibri" pitchFamily="34" charset="-122"/>
+                <a:cs typeface="Calibri" pitchFamily="34" charset="-120"/>
+              </a:rPr>
+              <a:t>Regulatory changes favor automation</a:t>
+            </a:r>
+            <a:endParaRPr lang="en-US" sz="1800" dirty="0"/>
           </a:p>
           <a:p>
             <a:pPr marL="342900" indent="-342900">
@@ -3119,14 +4321,115 @@
               <a:buChar char="•"/>
             </a:pPr>
             <a:r>
-              <a:rPr lang="en-US" sz="1600" dirty="0">
-                <a:solidFill>
-                  <a:srgbClr val="374151"/>
-                </a:solidFill>
-              </a:rPr>
-              <a:t>Consumer behavior trends</a:t>
-            </a:r>
-            <a:endParaRPr lang="en-US" sz="1600" dirty="0"/>
+              <a:rPr lang="en-US" sz="1800" b="1" dirty="0">
+                <a:solidFill>
+                  <a:srgbClr val="1F2937"/>
+                </a:solidFill>
+                <a:latin typeface="Calibri" pitchFamily="34" charset="0"/>
+                <a:ea typeface="Calibri" pitchFamily="34" charset="-122"/>
+                <a:cs typeface="Calibri" pitchFamily="34" charset="-120"/>
+              </a:rPr>
+              <a:t>Competition is asleep - enterprise incumbents haven't adapted</a:t>
+            </a:r>
+            <a:endParaRPr lang="en-US" sz="1800" dirty="0"/>
+          </a:p>
+        </p:txBody>
+      </p:sp>
+      <p:sp>
+        <p:nvSpPr>
+          <p:cNvPr id="6" name="Shape 4"/>
+          <p:cNvSpPr/>
+          <p:nvPr/>
+        </p:nvSpPr>
+        <p:spPr>
+          <a:xfrm>
+            <a:off x="0" y="6720840"/>
+            <a:ext cx="73152" cy="137160"/>
+          </a:xfrm>
+          <a:prstGeom prst="rect">
+            <a:avLst/>
+          </a:prstGeom>
+          <a:solidFill>
+            <a:srgbClr val="38BDF8"/>
+          </a:solidFill>
+          <a:ln/>
+        </p:spPr>
+      </p:sp>
+      <p:sp>
+        <p:nvSpPr>
+          <p:cNvPr id="7" name="Text 5"/>
+          <p:cNvSpPr/>
+          <p:nvPr/>
+        </p:nvSpPr>
+        <p:spPr>
+          <a:xfrm>
+            <a:off x="274320" y="6720840"/>
+            <a:ext cx="2743200" cy="137160"/>
+          </a:xfrm>
+          <a:prstGeom prst="rect">
+            <a:avLst/>
+          </a:prstGeom>
+          <a:noFill/>
+          <a:ln/>
+        </p:spPr>
+        <p:txBody>
+          <a:bodyPr wrap="square" rtlCol="0" anchor="ctr"/>
+          <a:lstStyle/>
+          <a:p>
+            <a:pPr indent="0" marL="0">
+              <a:buNone/>
+            </a:pPr>
+            <a:r>
+              <a:rPr lang="en-US" sz="1000" dirty="0">
+                <a:solidFill>
+                  <a:srgbClr val="6B7280"/>
+                </a:solidFill>
+                <a:latin typeface="Calibri" pitchFamily="34" charset="0"/>
+                <a:ea typeface="Calibri" pitchFamily="34" charset="-122"/>
+                <a:cs typeface="Calibri" pitchFamily="34" charset="-120"/>
+              </a:rPr>
+              <a:t>Creatives Takeover</a:t>
+            </a:r>
+            <a:endParaRPr lang="en-US" sz="1000" dirty="0"/>
+          </a:p>
+        </p:txBody>
+      </p:sp>
+      <p:sp>
+        <p:nvSpPr>
+          <p:cNvPr id="8" name="Text 6"/>
+          <p:cNvSpPr/>
+          <p:nvPr/>
+        </p:nvSpPr>
+        <p:spPr>
+          <a:xfrm>
+            <a:off x="8412480" y="6720840"/>
+            <a:ext cx="274320" cy="137160"/>
+          </a:xfrm>
+          <a:prstGeom prst="rect">
+            <a:avLst/>
+          </a:prstGeom>
+          <a:noFill/>
+          <a:ln/>
+        </p:spPr>
+        <p:txBody>
+          <a:bodyPr wrap="square" rtlCol="0" anchor="ctr"/>
+          <a:lstStyle/>
+          <a:p>
+            <a:pPr algn="r" indent="0" marL="0">
+              <a:buNone/>
+            </a:pPr>
+            <a:r>
+              <a:rPr lang="en-US" sz="1000" dirty="0">
+                <a:solidFill>
+                  <a:srgbClr val="6B7280"/>
+                </a:solidFill>
+                <a:latin typeface="Calibri" pitchFamily="34" charset="0"/>
+                <a:ea typeface="Calibri" pitchFamily="34" charset="-122"/>
+                <a:cs typeface="Calibri" pitchFamily="34" charset="-120"/>
+              </a:rPr>
+              <a:t>6</a:t>
+            </a:r>
+            <a:endParaRPr lang="en-US" sz="1000" dirty="0"/>
           </a:p>
         </p:txBody>
       </p:sp>
@@ -3138,9 +4441,16 @@
 </p:sld>
 </file>
 
-<file path=ppt/slides/slide6.xml><?xml version="1.0" encoding="utf-8"?>
+<file path=ppt/slides/slide7.xml><?xml version="1.0" encoding="utf-8"?>
 <p:sld xmlns:a="http://schemas.openxmlformats.org/drawingml/2006/main" xmlns:r="http://schemas.openxmlformats.org/officeDocument/2006/relationships" xmlns:p="http://schemas.openxmlformats.org/presentationml/2006/main">
-  <p:cSld name="Slide 6">
+  <p:cSld name="Slide 7">
+    <p:bg>
+      <p:bgPr>
+        <a:solidFill>
+          <a:srgbClr val="FFFFFF"/>
+        </a:solidFill>
+      </p:bgPr>
+    </p:bg>
     <p:spTree>
       <p:nvGrpSpPr>
         <p:cNvPr id="1" name=""/>
@@ -3157,14 +4467,34 @@
       </p:grpSpPr>
       <p:sp>
         <p:nvSpPr>
-          <p:cNvPr id="2" name="Text 0"/>
-          <p:cNvSpPr/>
-          <p:nvPr/>
-        </p:nvSpPr>
-        <p:spPr>
-          <a:xfrm>
-            <a:off x="457200" y="457200"/>
-            <a:ext cx="8229600" cy="685800"/>
+          <p:cNvPr id="2" name="Shape 0"/>
+          <p:cNvSpPr/>
+          <p:nvPr/>
+        </p:nvSpPr>
+        <p:spPr>
+          <a:xfrm>
+            <a:off x="0" y="0"/>
+            <a:ext cx="9144000" cy="137160"/>
+          </a:xfrm>
+          <a:prstGeom prst="rect">
+            <a:avLst/>
+          </a:prstGeom>
+          <a:solidFill>
+            <a:srgbClr val="0B1437"/>
+          </a:solidFill>
+          <a:ln/>
+        </p:spPr>
+      </p:sp>
+      <p:sp>
+        <p:nvSpPr>
+          <p:cNvPr id="3" name="Text 1"/>
+          <p:cNvSpPr/>
+          <p:nvPr/>
+        </p:nvSpPr>
+        <p:spPr>
+          <a:xfrm>
+            <a:off x="457200" y="365760"/>
+            <a:ext cx="8229600" cy="548640"/>
           </a:xfrm>
           <a:prstGeom prst="rect">
             <a:avLst/>
@@ -3184,8 +4514,11 @@
                 <a:solidFill>
                   <a:srgbClr val="0B1437"/>
                 </a:solidFill>
-              </a:rPr>
-              <a:t>The Solution</a:t>
+                <a:latin typeface="Calibri" pitchFamily="34" charset="0"/>
+                <a:ea typeface="Calibri" pitchFamily="34" charset="-122"/>
+                <a:cs typeface="Calibri" pitchFamily="34" charset="-120"/>
+              </a:rPr>
+              <a:t>Go-to-Market Strategy</a:t>
             </a:r>
             <a:endParaRPr lang="en-US" sz="3200" dirty="0"/>
           </a:p>
@@ -3193,7 +4526,46 @@
       </p:sp>
       <p:sp>
         <p:nvSpPr>
-          <p:cNvPr id="3" name="Text 1"/>
+          <p:cNvPr id="4" name="Text 2"/>
+          <p:cNvSpPr/>
+          <p:nvPr/>
+        </p:nvSpPr>
+        <p:spPr>
+          <a:xfrm>
+            <a:off x="457200" y="914400"/>
+            <a:ext cx="8229600" cy="365760"/>
+          </a:xfrm>
+          <a:prstGeom prst="rect">
+            <a:avLst/>
+          </a:prstGeom>
+          <a:noFill/>
+          <a:ln/>
+        </p:spPr>
+        <p:txBody>
+          <a:bodyPr wrap="square" rtlCol="0" anchor="ctr"/>
+          <a:lstStyle/>
+          <a:p>
+            <a:pPr indent="0" marL="0">
+              <a:buNone/>
+            </a:pPr>
+            <a:r>
+              <a:rPr lang="en-US" sz="1600" i="1" dirty="0">
+                <a:solidFill>
+                  <a:srgbClr val="6B7280"/>
+                </a:solidFill>
+                <a:latin typeface="Calibri" pitchFamily="34" charset="0"/>
+                <a:ea typeface="Calibri" pitchFamily="34" charset="-122"/>
+                <a:cs typeface="Calibri" pitchFamily="34" charset="-120"/>
+              </a:rPr>
+              <a:t>How will you reach customers?</a:t>
+            </a:r>
+            <a:endParaRPr lang="en-US" sz="1600" dirty="0"/>
+          </a:p>
+        </p:txBody>
+      </p:sp>
+      <p:sp>
+        <p:nvSpPr>
+          <p:cNvPr id="5" name="Text 3"/>
           <p:cNvSpPr/>
           <p:nvPr/>
         </p:nvSpPr>
@@ -3220,14 +4592,38 @@
               <a:buChar char="•"/>
             </a:pPr>
             <a:r>
-              <a:rPr lang="en-US" sz="1600" dirty="0">
-                <a:solidFill>
-                  <a:srgbClr val="374151"/>
-                </a:solidFill>
-              </a:rPr>
-              <a:t>How you're different</a:t>
-            </a:r>
-            <a:endParaRPr lang="en-US" sz="1600" dirty="0"/>
+              <a:rPr lang="en-US" sz="1800" b="1" dirty="0">
+                <a:solidFill>
+                  <a:srgbClr val="1F2937"/>
+                </a:solidFill>
+                <a:latin typeface="Calibri" pitchFamily="34" charset="0"/>
+                <a:ea typeface="Calibri" pitchFamily="34" charset="-122"/>
+                <a:cs typeface="Calibri" pitchFamily="34" charset="-120"/>
+              </a:rPr>
+              <a:t>Phase 1: Bottom-up adoption via self-serve freemium</a:t>
+            </a:r>
+            <a:endParaRPr lang="en-US" sz="1800" dirty="0"/>
+          </a:p>
+          <a:p>
+            <a:pPr lvl="1" marL="685800" indent="-342900">
+              <a:lnSpc>
+                <a:spcPts val="2800"/>
+              </a:lnSpc>
+              <a:buSzPct val="100000"/>
+              <a:buChar char="•"/>
+            </a:pPr>
+            <a:r>
+              <a:rPr lang="en-US" sz="1800" dirty="0">
+                <a:solidFill>
+                  <a:srgbClr val="6B7280"/>
+                </a:solidFill>
+                <a:latin typeface="Calibri" pitchFamily="34" charset="0"/>
+                <a:ea typeface="Calibri" pitchFamily="34" charset="-122"/>
+                <a:cs typeface="Calibri" pitchFamily="34" charset="-120"/>
+              </a:rPr>
+              <a:t>Example: "Free tier for solo businesses, paid tier for teams"</a:t>
+            </a:r>
+            <a:endParaRPr lang="en-US" sz="1800" dirty="0"/>
           </a:p>
           <a:p>
             <a:pPr marL="342900" indent="-342900">
@@ -3238,14 +4634,38 @@
               <a:buChar char="•"/>
             </a:pPr>
             <a:r>
-              <a:rPr lang="en-US" sz="1600" dirty="0">
-                <a:solidFill>
-                  <a:srgbClr val="374151"/>
-                </a:solidFill>
-              </a:rPr>
-              <a:t>Core innovation</a:t>
-            </a:r>
-            <a:endParaRPr lang="en-US" sz="1600" dirty="0"/>
+              <a:rPr lang="en-US" sz="1800" b="1" dirty="0">
+                <a:solidFill>
+                  <a:srgbClr val="1F2937"/>
+                </a:solidFill>
+                <a:latin typeface="Calibri" pitchFamily="34" charset="0"/>
+                <a:ea typeface="Calibri" pitchFamily="34" charset="-122"/>
+                <a:cs typeface="Calibri" pitchFamily="34" charset="-120"/>
+              </a:rPr>
+              <a:t>Phase 2: Viral growth through network effects</a:t>
+            </a:r>
+            <a:endParaRPr lang="en-US" sz="1800" dirty="0"/>
+          </a:p>
+          <a:p>
+            <a:pPr lvl="1" marL="685800" indent="-342900">
+              <a:lnSpc>
+                <a:spcPts val="2800"/>
+              </a:lnSpc>
+              <a:buSzPct val="100000"/>
+              <a:buChar char="•"/>
+            </a:pPr>
+            <a:r>
+              <a:rPr lang="en-US" sz="1800" dirty="0">
+                <a:solidFill>
+                  <a:srgbClr val="6B7280"/>
+                </a:solidFill>
+                <a:latin typeface="Calibri" pitchFamily="34" charset="0"/>
+                <a:ea typeface="Calibri" pitchFamily="34" charset="-122"/>
+                <a:cs typeface="Calibri" pitchFamily="34" charset="-120"/>
+              </a:rPr>
+              <a:t>Example: "Invoices sent via our platform include a 'Create your free account' CTA"</a:t>
+            </a:r>
+            <a:endParaRPr lang="en-US" sz="1800" dirty="0"/>
           </a:p>
           <a:p>
             <a:pPr marL="342900" indent="-342900">
@@ -3256,14 +4676,136 @@
               <a:buChar char="•"/>
             </a:pPr>
             <a:r>
-              <a:rPr lang="en-US" sz="1600" dirty="0">
-                <a:solidFill>
-                  <a:srgbClr val="374151"/>
-                </a:solidFill>
-              </a:rPr>
-              <a:t>Why it will work now</a:t>
-            </a:r>
-            <a:endParaRPr lang="en-US" sz="1600" dirty="0"/>
+              <a:rPr lang="en-US" sz="1800" b="1" dirty="0">
+                <a:solidFill>
+                  <a:srgbClr val="1F2937"/>
+                </a:solidFill>
+                <a:latin typeface="Calibri" pitchFamily="34" charset="0"/>
+                <a:ea typeface="Calibri" pitchFamily="34" charset="-122"/>
+                <a:cs typeface="Calibri" pitchFamily="34" charset="-120"/>
+              </a:rPr>
+              <a:t>Phase 3: Enterprise expansion</a:t>
+            </a:r>
+            <a:endParaRPr lang="en-US" sz="1800" dirty="0"/>
+          </a:p>
+          <a:p>
+            <a:pPr lvl="1" marL="685800" indent="-342900">
+              <a:lnSpc>
+                <a:spcPts val="2800"/>
+              </a:lnSpc>
+              <a:buSzPct val="100000"/>
+              <a:buChar char="•"/>
+            </a:pPr>
+            <a:r>
+              <a:rPr lang="en-US" sz="1800" dirty="0">
+                <a:solidFill>
+                  <a:srgbClr val="6B7280"/>
+                </a:solidFill>
+                <a:latin typeface="Calibri" pitchFamily="34" charset="0"/>
+                <a:ea typeface="Calibri" pitchFamily="34" charset="-122"/>
+                <a:cs typeface="Calibri" pitchFamily="34" charset="-120"/>
+              </a:rPr>
+              <a:t>Example: "Land small teams, expand to entire organization"</a:t>
+            </a:r>
+            <a:endParaRPr lang="en-US" sz="1800" dirty="0"/>
+          </a:p>
+        </p:txBody>
+      </p:sp>
+      <p:sp>
+        <p:nvSpPr>
+          <p:cNvPr id="6" name="Shape 4"/>
+          <p:cNvSpPr/>
+          <p:nvPr/>
+        </p:nvSpPr>
+        <p:spPr>
+          <a:xfrm>
+            <a:off x="0" y="6720840"/>
+            <a:ext cx="73152" cy="137160"/>
+          </a:xfrm>
+          <a:prstGeom prst="rect">
+            <a:avLst/>
+          </a:prstGeom>
+          <a:solidFill>
+            <a:srgbClr val="38BDF8"/>
+          </a:solidFill>
+          <a:ln/>
+        </p:spPr>
+      </p:sp>
+      <p:sp>
+        <p:nvSpPr>
+          <p:cNvPr id="7" name="Text 5"/>
+          <p:cNvSpPr/>
+          <p:nvPr/>
+        </p:nvSpPr>
+        <p:spPr>
+          <a:xfrm>
+            <a:off x="274320" y="6720840"/>
+            <a:ext cx="2743200" cy="137160"/>
+          </a:xfrm>
+          <a:prstGeom prst="rect">
+            <a:avLst/>
+          </a:prstGeom>
+          <a:noFill/>
+          <a:ln/>
+        </p:spPr>
+        <p:txBody>
+          <a:bodyPr wrap="square" rtlCol="0" anchor="ctr"/>
+          <a:lstStyle/>
+          <a:p>
+            <a:pPr indent="0" marL="0">
+              <a:buNone/>
+            </a:pPr>
+            <a:r>
+              <a:rPr lang="en-US" sz="1000" dirty="0">
+                <a:solidFill>
+                  <a:srgbClr val="6B7280"/>
+                </a:solidFill>
+                <a:latin typeface="Calibri" pitchFamily="34" charset="0"/>
+                <a:ea typeface="Calibri" pitchFamily="34" charset="-122"/>
+                <a:cs typeface="Calibri" pitchFamily="34" charset="-120"/>
+              </a:rPr>
+              <a:t>Creatives Takeover</a:t>
+            </a:r>
+            <a:endParaRPr lang="en-US" sz="1000" dirty="0"/>
+          </a:p>
+        </p:txBody>
+      </p:sp>
+      <p:sp>
+        <p:nvSpPr>
+          <p:cNvPr id="8" name="Text 6"/>
+          <p:cNvSpPr/>
+          <p:nvPr/>
+        </p:nvSpPr>
+        <p:spPr>
+          <a:xfrm>
+            <a:off x="8412480" y="6720840"/>
+            <a:ext cx="274320" cy="137160"/>
+          </a:xfrm>
+          <a:prstGeom prst="rect">
+            <a:avLst/>
+          </a:prstGeom>
+          <a:noFill/>
+          <a:ln/>
+        </p:spPr>
+        <p:txBody>
+          <a:bodyPr wrap="square" rtlCol="0" anchor="ctr"/>
+          <a:lstStyle/>
+          <a:p>
+            <a:pPr algn="r" indent="0" marL="0">
+              <a:buNone/>
+            </a:pPr>
+            <a:r>
+              <a:rPr lang="en-US" sz="1000" dirty="0">
+                <a:solidFill>
+                  <a:srgbClr val="6B7280"/>
+                </a:solidFill>
+                <a:latin typeface="Calibri" pitchFamily="34" charset="0"/>
+                <a:ea typeface="Calibri" pitchFamily="34" charset="-122"/>
+                <a:cs typeface="Calibri" pitchFamily="34" charset="-120"/>
+              </a:rPr>
+              <a:t>7</a:t>
+            </a:r>
+            <a:endParaRPr lang="en-US" sz="1000" dirty="0"/>
           </a:p>
         </p:txBody>
       </p:sp>
@@ -3275,9 +4817,16 @@
 </p:sld>
 </file>
 
-<file path=ppt/slides/slide7.xml><?xml version="1.0" encoding="utf-8"?>
+<file path=ppt/slides/slide8.xml><?xml version="1.0" encoding="utf-8"?>
 <p:sld xmlns:a="http://schemas.openxmlformats.org/drawingml/2006/main" xmlns:r="http://schemas.openxmlformats.org/officeDocument/2006/relationships" xmlns:p="http://schemas.openxmlformats.org/presentationml/2006/main">
-  <p:cSld name="Slide 7">
+  <p:cSld name="Slide 8">
+    <p:bg>
+      <p:bgPr>
+        <a:solidFill>
+          <a:srgbClr val="FFFFFF"/>
+        </a:solidFill>
+      </p:bgPr>
+    </p:bg>
     <p:spTree>
       <p:nvGrpSpPr>
         <p:cNvPr id="1" name=""/>
@@ -3294,14 +4843,34 @@
       </p:grpSpPr>
       <p:sp>
         <p:nvSpPr>
-          <p:cNvPr id="2" name="Text 0"/>
-          <p:cNvSpPr/>
-          <p:nvPr/>
-        </p:nvSpPr>
-        <p:spPr>
-          <a:xfrm>
-            <a:off x="457200" y="457200"/>
-            <a:ext cx="8229600" cy="685800"/>
+          <p:cNvPr id="2" name="Shape 0"/>
+          <p:cNvSpPr/>
+          <p:nvPr/>
+        </p:nvSpPr>
+        <p:spPr>
+          <a:xfrm>
+            <a:off x="0" y="0"/>
+            <a:ext cx="9144000" cy="137160"/>
+          </a:xfrm>
+          <a:prstGeom prst="rect">
+            <a:avLst/>
+          </a:prstGeom>
+          <a:solidFill>
+            <a:srgbClr val="0B1437"/>
+          </a:solidFill>
+          <a:ln/>
+        </p:spPr>
+      </p:sp>
+      <p:sp>
+        <p:nvSpPr>
+          <p:cNvPr id="3" name="Text 1"/>
+          <p:cNvSpPr/>
+          <p:nvPr/>
+        </p:nvSpPr>
+        <p:spPr>
+          <a:xfrm>
+            <a:off x="457200" y="365760"/>
+            <a:ext cx="8229600" cy="548640"/>
           </a:xfrm>
           <a:prstGeom prst="rect">
             <a:avLst/>
@@ -3321,8 +4890,11 @@
                 <a:solidFill>
                   <a:srgbClr val="0B1437"/>
                 </a:solidFill>
-              </a:rPr>
-              <a:t>Product</a:t>
+                <a:latin typeface="Calibri" pitchFamily="34" charset="0"/>
+                <a:ea typeface="Calibri" pitchFamily="34" charset="-122"/>
+                <a:cs typeface="Calibri" pitchFamily="34" charset="-120"/>
+              </a:rPr>
+              <a:t>The Opportunity</a:t>
             </a:r>
             <a:endParaRPr lang="en-US" sz="3200" dirty="0"/>
           </a:p>
@@ -3330,7 +4902,46 @@
       </p:sp>
       <p:sp>
         <p:nvSpPr>
-          <p:cNvPr id="3" name="Text 1"/>
+          <p:cNvPr id="4" name="Text 2"/>
+          <p:cNvSpPr/>
+          <p:nvPr/>
+        </p:nvSpPr>
+        <p:spPr>
+          <a:xfrm>
+            <a:off x="457200" y="914400"/>
+            <a:ext cx="8229600" cy="365760"/>
+          </a:xfrm>
+          <a:prstGeom prst="rect">
+            <a:avLst/>
+          </a:prstGeom>
+          <a:noFill/>
+          <a:ln/>
+        </p:spPr>
+        <p:txBody>
+          <a:bodyPr wrap="square" rtlCol="0" anchor="ctr"/>
+          <a:lstStyle/>
+          <a:p>
+            <a:pPr indent="0" marL="0">
+              <a:buNone/>
+            </a:pPr>
+            <a:r>
+              <a:rPr lang="en-US" sz="1600" i="1" dirty="0">
+                <a:solidFill>
+                  <a:srgbClr val="6B7280"/>
+                </a:solidFill>
+                <a:latin typeface="Calibri" pitchFamily="34" charset="0"/>
+                <a:ea typeface="Calibri" pitchFamily="34" charset="-122"/>
+                <a:cs typeface="Calibri" pitchFamily="34" charset="-120"/>
+              </a:rPr>
+              <a:t>Market size and potential</a:t>
+            </a:r>
+            <a:endParaRPr lang="en-US" sz="1600" dirty="0"/>
+          </a:p>
+        </p:txBody>
+      </p:sp>
+      <p:sp>
+        <p:nvSpPr>
+          <p:cNvPr id="5" name="Text 3"/>
           <p:cNvSpPr/>
           <p:nvPr/>
         </p:nvSpPr>
@@ -3357,14 +4968,17 @@
               <a:buChar char="•"/>
             </a:pPr>
             <a:r>
-              <a:rPr lang="en-US" sz="1600" dirty="0">
-                <a:solidFill>
-                  <a:srgbClr val="374151"/>
-                </a:solidFill>
-              </a:rPr>
-              <a:t>Product demo or mockup</a:t>
-            </a:r>
-            <a:endParaRPr lang="en-US" sz="1600" dirty="0"/>
+              <a:rPr lang="en-US" sz="1800" b="1" dirty="0">
+                <a:solidFill>
+                  <a:srgbClr val="1F2937"/>
+                </a:solidFill>
+                <a:latin typeface="Calibri" pitchFamily="34" charset="0"/>
+                <a:ea typeface="Calibri" pitchFamily="34" charset="-122"/>
+                <a:cs typeface="Calibri" pitchFamily="34" charset="-120"/>
+              </a:rPr>
+              <a:t>TAM: $50B (all small business accounting software)</a:t>
+            </a:r>
+            <a:endParaRPr lang="en-US" sz="1800" dirty="0"/>
           </a:p>
           <a:p>
             <a:pPr marL="342900" indent="-342900">
@@ -3375,14 +4989,17 @@
               <a:buChar char="•"/>
             </a:pPr>
             <a:r>
-              <a:rPr lang="en-US" sz="1600" dirty="0">
-                <a:solidFill>
-                  <a:srgbClr val="374151"/>
-                </a:solidFill>
-              </a:rPr>
-              <a:t>Key capabilities</a:t>
-            </a:r>
-            <a:endParaRPr lang="en-US" sz="1600" dirty="0"/>
+              <a:rPr lang="en-US" sz="1800" b="1" dirty="0">
+                <a:solidFill>
+                  <a:srgbClr val="1F2937"/>
+                </a:solidFill>
+                <a:latin typeface="Calibri" pitchFamily="34" charset="0"/>
+                <a:ea typeface="Calibri" pitchFamily="34" charset="-122"/>
+                <a:cs typeface="Calibri" pitchFamily="34" charset="-120"/>
+              </a:rPr>
+              <a:t>Growing at 12% annually</a:t>
+            </a:r>
+            <a:endParaRPr lang="en-US" sz="1800" dirty="0"/>
           </a:p>
           <a:p>
             <a:pPr marL="342900" indent="-342900">
@@ -3393,14 +5010,136 @@
               <a:buChar char="•"/>
             </a:pPr>
             <a:r>
-              <a:rPr lang="en-US" sz="1600" dirty="0">
-                <a:solidFill>
-                  <a:srgbClr val="374151"/>
-                </a:solidFill>
-              </a:rPr>
-              <a:t>User experience</a:t>
-            </a:r>
-            <a:endParaRPr lang="en-US" sz="1600" dirty="0"/>
+              <a:rPr lang="en-US" sz="1800" b="1" dirty="0">
+                <a:solidFill>
+                  <a:srgbClr val="1F2937"/>
+                </a:solidFill>
+                <a:latin typeface="Calibri" pitchFamily="34" charset="0"/>
+                <a:ea typeface="Calibri" pitchFamily="34" charset="-122"/>
+                <a:cs typeface="Calibri" pitchFamily="34" charset="-120"/>
+              </a:rPr>
+              <a:t>We're targeting the underserved 15M small businesses</a:t>
+            </a:r>
+            <a:endParaRPr lang="en-US" sz="1800" dirty="0"/>
+          </a:p>
+          <a:p>
+            <a:pPr marL="342900" indent="-342900">
+              <a:lnSpc>
+                <a:spcPts val="2800"/>
+              </a:lnSpc>
+              <a:buSzPct val="100000"/>
+              <a:buChar char="•"/>
+            </a:pPr>
+            <a:r>
+              <a:rPr lang="en-US" sz="1800" b="1" dirty="0">
+                <a:solidFill>
+                  <a:srgbClr val="10B981"/>
+                </a:solidFill>
+                <a:latin typeface="Calibri" pitchFamily="34" charset="0"/>
+                <a:ea typeface="Calibri" pitchFamily="34" charset="-122"/>
+                <a:cs typeface="Calibri" pitchFamily="34" charset="-120"/>
+              </a:rPr>
+              <a:t>If we capture just 2%, that's a $1B revenue opportunity</a:t>
+            </a:r>
+            <a:endParaRPr lang="en-US" sz="1800" dirty="0"/>
+          </a:p>
+        </p:txBody>
+      </p:sp>
+      <p:sp>
+        <p:nvSpPr>
+          <p:cNvPr id="6" name="Shape 4"/>
+          <p:cNvSpPr/>
+          <p:nvPr/>
+        </p:nvSpPr>
+        <p:spPr>
+          <a:xfrm>
+            <a:off x="0" y="6720840"/>
+            <a:ext cx="73152" cy="137160"/>
+          </a:xfrm>
+          <a:prstGeom prst="rect">
+            <a:avLst/>
+          </a:prstGeom>
+          <a:solidFill>
+            <a:srgbClr val="38BDF8"/>
+          </a:solidFill>
+          <a:ln/>
+        </p:spPr>
+      </p:sp>
+      <p:sp>
+        <p:nvSpPr>
+          <p:cNvPr id="7" name="Text 5"/>
+          <p:cNvSpPr/>
+          <p:nvPr/>
+        </p:nvSpPr>
+        <p:spPr>
+          <a:xfrm>
+            <a:off x="274320" y="6720840"/>
+            <a:ext cx="2743200" cy="137160"/>
+          </a:xfrm>
+          <a:prstGeom prst="rect">
+            <a:avLst/>
+          </a:prstGeom>
+          <a:noFill/>
+          <a:ln/>
+        </p:spPr>
+        <p:txBody>
+          <a:bodyPr wrap="square" rtlCol="0" anchor="ctr"/>
+          <a:lstStyle/>
+          <a:p>
+            <a:pPr indent="0" marL="0">
+              <a:buNone/>
+            </a:pPr>
+            <a:r>
+              <a:rPr lang="en-US" sz="1000" dirty="0">
+                <a:solidFill>
+                  <a:srgbClr val="6B7280"/>
+                </a:solidFill>
+                <a:latin typeface="Calibri" pitchFamily="34" charset="0"/>
+                <a:ea typeface="Calibri" pitchFamily="34" charset="-122"/>
+                <a:cs typeface="Calibri" pitchFamily="34" charset="-120"/>
+              </a:rPr>
+              <a:t>Creatives Takeover</a:t>
+            </a:r>
+            <a:endParaRPr lang="en-US" sz="1000" dirty="0"/>
+          </a:p>
+        </p:txBody>
+      </p:sp>
+      <p:sp>
+        <p:nvSpPr>
+          <p:cNvPr id="8" name="Text 6"/>
+          <p:cNvSpPr/>
+          <p:nvPr/>
+        </p:nvSpPr>
+        <p:spPr>
+          <a:xfrm>
+            <a:off x="8412480" y="6720840"/>
+            <a:ext cx="274320" cy="137160"/>
+          </a:xfrm>
+          <a:prstGeom prst="rect">
+            <a:avLst/>
+          </a:prstGeom>
+          <a:noFill/>
+          <a:ln/>
+        </p:spPr>
+        <p:txBody>
+          <a:bodyPr wrap="square" rtlCol="0" anchor="ctr"/>
+          <a:lstStyle/>
+          <a:p>
+            <a:pPr algn="r" indent="0" marL="0">
+              <a:buNone/>
+            </a:pPr>
+            <a:r>
+              <a:rPr lang="en-US" sz="1000" dirty="0">
+                <a:solidFill>
+                  <a:srgbClr val="6B7280"/>
+                </a:solidFill>
+                <a:latin typeface="Calibri" pitchFamily="34" charset="0"/>
+                <a:ea typeface="Calibri" pitchFamily="34" charset="-122"/>
+                <a:cs typeface="Calibri" pitchFamily="34" charset="-120"/>
+              </a:rPr>
+              <a:t>8</a:t>
+            </a:r>
+            <a:endParaRPr lang="en-US" sz="1000" dirty="0"/>
           </a:p>
         </p:txBody>
       </p:sp>
@@ -3412,9 +5151,16 @@
 </p:sld>
 </file>
 
-<file path=ppt/slides/slide8.xml><?xml version="1.0" encoding="utf-8"?>
+<file path=ppt/slides/slide9.xml><?xml version="1.0" encoding="utf-8"?>
 <p:sld xmlns:a="http://schemas.openxmlformats.org/drawingml/2006/main" xmlns:r="http://schemas.openxmlformats.org/officeDocument/2006/relationships" xmlns:p="http://schemas.openxmlformats.org/presentationml/2006/main">
-  <p:cSld name="Slide 8">
+  <p:cSld name="Slide 9">
+    <p:bg>
+      <p:bgPr>
+        <a:solidFill>
+          <a:srgbClr val="FFFFFF"/>
+        </a:solidFill>
+      </p:bgPr>
+    </p:bg>
     <p:spTree>
       <p:nvGrpSpPr>
         <p:cNvPr id="1" name=""/>
@@ -3431,14 +5177,34 @@
       </p:grpSpPr>
       <p:sp>
         <p:nvSpPr>
-          <p:cNvPr id="2" name="Text 0"/>
-          <p:cNvSpPr/>
-          <p:nvPr/>
-        </p:nvSpPr>
-        <p:spPr>
-          <a:xfrm>
-            <a:off x="457200" y="457200"/>
-            <a:ext cx="8229600" cy="685800"/>
+          <p:cNvPr id="2" name="Shape 0"/>
+          <p:cNvSpPr/>
+          <p:nvPr/>
+        </p:nvSpPr>
+        <p:spPr>
+          <a:xfrm>
+            <a:off x="0" y="0"/>
+            <a:ext cx="9144000" cy="137160"/>
+          </a:xfrm>
+          <a:prstGeom prst="rect">
+            <a:avLst/>
+          </a:prstGeom>
+          <a:solidFill>
+            <a:srgbClr val="0B1437"/>
+          </a:solidFill>
+          <a:ln/>
+        </p:spPr>
+      </p:sp>
+      <p:sp>
+        <p:nvSpPr>
+          <p:cNvPr id="3" name="Text 1"/>
+          <p:cNvSpPr/>
+          <p:nvPr/>
+        </p:nvSpPr>
+        <p:spPr>
+          <a:xfrm>
+            <a:off x="457200" y="365760"/>
+            <a:ext cx="8229600" cy="548640"/>
           </a:xfrm>
           <a:prstGeom prst="rect">
             <a:avLst/>
@@ -3458,8 +5224,11 @@
                 <a:solidFill>
                   <a:srgbClr val="0B1437"/>
                 </a:solidFill>
-              </a:rPr>
-              <a:t>Market Opportunity</a:t>
+                <a:latin typeface="Calibri" pitchFamily="34" charset="0"/>
+                <a:ea typeface="Calibri" pitchFamily="34" charset="-122"/>
+                <a:cs typeface="Calibri" pitchFamily="34" charset="-120"/>
+              </a:rPr>
+              <a:t>Early Proof Points</a:t>
             </a:r>
             <a:endParaRPr lang="en-US" sz="3200" dirty="0"/>
           </a:p>
@@ -3467,7 +5236,46 @@
       </p:sp>
       <p:sp>
         <p:nvSpPr>
-          <p:cNvPr id="3" name="Text 1"/>
+          <p:cNvPr id="4" name="Text 2"/>
+          <p:cNvSpPr/>
+          <p:nvPr/>
+        </p:nvSpPr>
+        <p:spPr>
+          <a:xfrm>
+            <a:off x="457200" y="914400"/>
+            <a:ext cx="8229600" cy="365760"/>
+          </a:xfrm>
+          <a:prstGeom prst="rect">
+            <a:avLst/>
+          </a:prstGeom>
+          <a:noFill/>
+          <a:ln/>
+        </p:spPr>
+        <p:txBody>
+          <a:bodyPr wrap="square" rtlCol="0" anchor="ctr"/>
+          <a:lstStyle/>
+          <a:p>
+            <a:pPr indent="0" marL="0">
+              <a:buNone/>
+            </a:pPr>
+            <a:r>
+              <a:rPr lang="en-US" sz="1600" i="1" dirty="0">
+                <a:solidFill>
+                  <a:srgbClr val="6B7280"/>
+                </a:solidFill>
+                <a:latin typeface="Calibri" pitchFamily="34" charset="0"/>
+                <a:ea typeface="Calibri" pitchFamily="34" charset="-122"/>
+                <a:cs typeface="Calibri" pitchFamily="34" charset="-120"/>
+              </a:rPr>
+              <a:t>Validation so far</a:t>
+            </a:r>
+            <a:endParaRPr lang="en-US" sz="1600" dirty="0"/>
+          </a:p>
+        </p:txBody>
+      </p:sp>
+      <p:sp>
+        <p:nvSpPr>
+          <p:cNvPr id="5" name="Text 3"/>
           <p:cNvSpPr/>
           <p:nvPr/>
         </p:nvSpPr>
@@ -3494,14 +5302,17 @@
               <a:buChar char="•"/>
             </a:pPr>
             <a:r>
-              <a:rPr lang="en-US" sz="1600" dirty="0">
-                <a:solidFill>
-                  <a:srgbClr val="374151"/>
-                </a:solidFill>
-              </a:rPr>
-              <a:t>Market size</a:t>
-            </a:r>
-            <a:endParaRPr lang="en-US" sz="1600" dirty="0"/>
+              <a:rPr lang="en-US" sz="1800" b="1" dirty="0">
+                <a:solidFill>
+                  <a:srgbClr val="1F2937"/>
+                </a:solidFill>
+                <a:latin typeface="Calibri" pitchFamily="34" charset="0"/>
+                <a:ea typeface="Calibri" pitchFamily="34" charset="-122"/>
+                <a:cs typeface="Calibri" pitchFamily="34" charset="-120"/>
+              </a:rPr>
+              <a:t>Beta launched 3 months ago</a:t>
+            </a:r>
+            <a:endParaRPr lang="en-US" sz="1800" dirty="0"/>
           </a:p>
           <a:p>
             <a:pPr marL="342900" indent="-342900">
@@ -3512,14 +5323,38 @@
               <a:buChar char="•"/>
             </a:pPr>
             <a:r>
-              <a:rPr lang="en-US" sz="1600" dirty="0">
-                <a:solidFill>
-                  <a:srgbClr val="374151"/>
-                </a:solidFill>
-              </a:rPr>
-              <a:t>Growth trajectory</a:t>
-            </a:r>
-            <a:endParaRPr lang="en-US" sz="1600" dirty="0"/>
+              <a:rPr lang="en-US" sz="1800" b="1" dirty="0">
+                <a:solidFill>
+                  <a:srgbClr val="1F2937"/>
+                </a:solidFill>
+                <a:latin typeface="Calibri" pitchFamily="34" charset="0"/>
+                <a:ea typeface="Calibri" pitchFamily="34" charset="-122"/>
+                <a:cs typeface="Calibri" pitchFamily="34" charset="-120"/>
+              </a:rPr>
+              <a:t>200 beta users, 85% active weekly</a:t>
+            </a:r>
+            <a:endParaRPr lang="en-US" sz="1800" dirty="0"/>
+          </a:p>
+          <a:p>
+            <a:pPr lvl="1" marL="685800" indent="-342900">
+              <a:lnSpc>
+                <a:spcPts val="2800"/>
+              </a:lnSpc>
+              <a:buSzPct val="100000"/>
+              <a:buChar char="•"/>
+            </a:pPr>
+            <a:r>
+              <a:rPr lang="en-US" sz="1800" dirty="0">
+                <a:solidFill>
+                  <a:srgbClr val="10B981"/>
+                </a:solidFill>
+                <a:latin typeface="Calibri" pitchFamily="34" charset="0"/>
+                <a:ea typeface="Calibri" pitchFamily="34" charset="-122"/>
+                <a:cs typeface="Calibri" pitchFamily="34" charset="-120"/>
+              </a:rPr>
+              <a:t>"This is magic" - Sarah, bakery owner</a:t>
+            </a:r>
+            <a:endParaRPr lang="en-US" sz="1800" dirty="0"/>
           </a:p>
           <a:p>
             <a:pPr marL="342900" indent="-342900">
@@ -3530,98 +5365,18 @@
               <a:buChar char="•"/>
             </a:pPr>
             <a:r>
-              <a:rPr lang="en-US" sz="1600" dirty="0">
-                <a:solidFill>
-                  <a:srgbClr val="374151"/>
-                </a:solidFill>
-              </a:rPr>
-              <a:t>Adjacent markets</a:t>
-            </a:r>
-            <a:endParaRPr lang="en-US" sz="1600" dirty="0"/>
-          </a:p>
-        </p:txBody>
-      </p:sp>
-    </p:spTree>
-  </p:cSld>
-  <p:clrMapOvr>
-    <a:masterClrMapping/>
-  </p:clrMapOvr>
-</p:sld>
-</file>
-
-<file path=ppt/slides/slide9.xml><?xml version="1.0" encoding="utf-8"?>
-<p:sld xmlns:a="http://schemas.openxmlformats.org/drawingml/2006/main" xmlns:r="http://schemas.openxmlformats.org/officeDocument/2006/relationships" xmlns:p="http://schemas.openxmlformats.org/presentationml/2006/main">
-  <p:cSld name="Slide 9">
-    <p:spTree>
-      <p:nvGrpSpPr>
-        <p:cNvPr id="1" name=""/>
-        <p:cNvGrpSpPr/>
-        <p:nvPr/>
-      </p:nvGrpSpPr>
-      <p:grpSpPr>
-        <a:xfrm>
-          <a:off x="0" y="0"/>
-          <a:ext cx="0" cy="0"/>
-          <a:chOff x="0" y="0"/>
-          <a:chExt cx="0" cy="0"/>
-        </a:xfrm>
-      </p:grpSpPr>
-      <p:sp>
-        <p:nvSpPr>
-          <p:cNvPr id="2" name="Text 0"/>
-          <p:cNvSpPr/>
-          <p:nvPr/>
-        </p:nvSpPr>
-        <p:spPr>
-          <a:xfrm>
-            <a:off x="457200" y="457200"/>
-            <a:ext cx="8229600" cy="685800"/>
-          </a:xfrm>
-          <a:prstGeom prst="rect">
-            <a:avLst/>
-          </a:prstGeom>
-          <a:noFill/>
-          <a:ln/>
-        </p:spPr>
-        <p:txBody>
-          <a:bodyPr wrap="square" rtlCol="0" anchor="ctr"/>
-          <a:lstStyle/>
-          <a:p>
-            <a:pPr indent="0" marL="0">
-              <a:buNone/>
-            </a:pPr>
-            <a:r>
-              <a:rPr lang="en-US" sz="3200" b="1" dirty="0">
-                <a:solidFill>
-                  <a:srgbClr val="0B1437"/>
-                </a:solidFill>
-              </a:rPr>
-              <a:t>Traction</a:t>
-            </a:r>
-            <a:endParaRPr lang="en-US" sz="3200" dirty="0"/>
-          </a:p>
-        </p:txBody>
-      </p:sp>
-      <p:sp>
-        <p:nvSpPr>
-          <p:cNvPr id="3" name="Text 1"/>
-          <p:cNvSpPr/>
-          <p:nvPr/>
-        </p:nvSpPr>
-        <p:spPr>
-          <a:xfrm>
-            <a:off x="457200" y="1371600"/>
-            <a:ext cx="8229600" cy="4114800"/>
-          </a:xfrm>
-          <a:prstGeom prst="rect">
-            <a:avLst/>
-          </a:prstGeom>
-          <a:noFill/>
-          <a:ln/>
-        </p:spPr>
-        <p:txBody>
-          <a:bodyPr wrap="square" rtlCol="0" anchor="ctr"/>
-          <a:lstStyle/>
+              <a:rPr lang="en-US" sz="1800" b="1" dirty="0">
+                <a:solidFill>
+                  <a:srgbClr val="1F2937"/>
+                </a:solidFill>
+                <a:latin typeface="Calibri" pitchFamily="34" charset="0"/>
+                <a:ea typeface="Calibri" pitchFamily="34" charset="-122"/>
+                <a:cs typeface="Calibri" pitchFamily="34" charset="-120"/>
+              </a:rPr>
+              <a:t>Pilot partnerships with 3 accounting firms</a:t>
+            </a:r>
+            <a:endParaRPr lang="en-US" sz="1800" dirty="0"/>
+          </a:p>
           <a:p>
             <a:pPr marL="342900" indent="-342900">
               <a:lnSpc>
@@ -3631,68 +5386,115 @@
               <a:buChar char="•"/>
             </a:pPr>
             <a:r>
-              <a:rPr lang="en-US" sz="1600" dirty="0">
-                <a:solidFill>
-                  <a:srgbClr val="374151"/>
-                </a:solidFill>
-              </a:rPr>
-              <a:t>Early adopters</a:t>
-            </a:r>
-            <a:endParaRPr lang="en-US" sz="1600" dirty="0"/>
-          </a:p>
-          <a:p>
-            <a:pPr marL="342900" indent="-342900">
-              <a:lnSpc>
-                <a:spcPts val="2800"/>
-              </a:lnSpc>
-              <a:buSzPct val="100000"/>
-              <a:buChar char="•"/>
-            </a:pPr>
-            <a:r>
-              <a:rPr lang="en-US" sz="1600" dirty="0">
-                <a:solidFill>
-                  <a:srgbClr val="374151"/>
-                </a:solidFill>
-              </a:rPr>
-              <a:t>Partnerships</a:t>
-            </a:r>
-            <a:endParaRPr lang="en-US" sz="1600" dirty="0"/>
-          </a:p>
-          <a:p>
-            <a:pPr marL="342900" indent="-342900">
-              <a:lnSpc>
-                <a:spcPts val="2800"/>
-              </a:lnSpc>
-              <a:buSzPct val="100000"/>
-              <a:buChar char="•"/>
-            </a:pPr>
-            <a:r>
-              <a:rPr lang="en-US" sz="1600" dirty="0">
-                <a:solidFill>
-                  <a:srgbClr val="374151"/>
-                </a:solidFill>
-              </a:rPr>
-              <a:t>Pilot programs</a:t>
-            </a:r>
-            <a:endParaRPr lang="en-US" sz="1600" dirty="0"/>
-          </a:p>
-          <a:p>
-            <a:pPr marL="342900" indent="-342900">
-              <a:lnSpc>
-                <a:spcPts val="2800"/>
-              </a:lnSpc>
-              <a:buSzPct val="100000"/>
-              <a:buChar char="•"/>
-            </a:pPr>
-            <a:r>
-              <a:rPr lang="en-US" sz="1600" dirty="0">
-                <a:solidFill>
-                  <a:srgbClr val="374151"/>
-                </a:solidFill>
-              </a:rPr>
-              <a:t>Letters of intent</a:t>
-            </a:r>
-            <a:endParaRPr lang="en-US" sz="1600" dirty="0"/>
+              <a:rPr lang="en-US" sz="1800" b="1" dirty="0">
+                <a:solidFill>
+                  <a:srgbClr val="1F2937"/>
+                </a:solidFill>
+                <a:latin typeface="Calibri" pitchFamily="34" charset="0"/>
+                <a:ea typeface="Calibri" pitchFamily="34" charset="-122"/>
+                <a:cs typeface="Calibri" pitchFamily="34" charset="-120"/>
+              </a:rPr>
+              <a:t>Waitlist of 5,000 businesses</a:t>
+            </a:r>
+            <a:endParaRPr lang="en-US" sz="1800" dirty="0"/>
+          </a:p>
+        </p:txBody>
+      </p:sp>
+      <p:sp>
+        <p:nvSpPr>
+          <p:cNvPr id="6" name="Shape 4"/>
+          <p:cNvSpPr/>
+          <p:nvPr/>
+        </p:nvSpPr>
+        <p:spPr>
+          <a:xfrm>
+            <a:off x="0" y="6720840"/>
+            <a:ext cx="73152" cy="137160"/>
+          </a:xfrm>
+          <a:prstGeom prst="rect">
+            <a:avLst/>
+          </a:prstGeom>
+          <a:solidFill>
+            <a:srgbClr val="38BDF8"/>
+          </a:solidFill>
+          <a:ln/>
+        </p:spPr>
+      </p:sp>
+      <p:sp>
+        <p:nvSpPr>
+          <p:cNvPr id="7" name="Text 5"/>
+          <p:cNvSpPr/>
+          <p:nvPr/>
+        </p:nvSpPr>
+        <p:spPr>
+          <a:xfrm>
+            <a:off x="274320" y="6720840"/>
+            <a:ext cx="2743200" cy="137160"/>
+          </a:xfrm>
+          <a:prstGeom prst="rect">
+            <a:avLst/>
+          </a:prstGeom>
+          <a:noFill/>
+          <a:ln/>
+        </p:spPr>
+        <p:txBody>
+          <a:bodyPr wrap="square" rtlCol="0" anchor="ctr"/>
+          <a:lstStyle/>
+          <a:p>
+            <a:pPr indent="0" marL="0">
+              <a:buNone/>
+            </a:pPr>
+            <a:r>
+              <a:rPr lang="en-US" sz="1000" dirty="0">
+                <a:solidFill>
+                  <a:srgbClr val="6B7280"/>
+                </a:solidFill>
+                <a:latin typeface="Calibri" pitchFamily="34" charset="0"/>
+                <a:ea typeface="Calibri" pitchFamily="34" charset="-122"/>
+                <a:cs typeface="Calibri" pitchFamily="34" charset="-120"/>
+              </a:rPr>
+              <a:t>Creatives Takeover</a:t>
+            </a:r>
+            <a:endParaRPr lang="en-US" sz="1000" dirty="0"/>
+          </a:p>
+        </p:txBody>
+      </p:sp>
+      <p:sp>
+        <p:nvSpPr>
+          <p:cNvPr id="8" name="Text 6"/>
+          <p:cNvSpPr/>
+          <p:nvPr/>
+        </p:nvSpPr>
+        <p:spPr>
+          <a:xfrm>
+            <a:off x="8412480" y="6720840"/>
+            <a:ext cx="274320" cy="137160"/>
+          </a:xfrm>
+          <a:prstGeom prst="rect">
+            <a:avLst/>
+          </a:prstGeom>
+          <a:noFill/>
+          <a:ln/>
+        </p:spPr>
+        <p:txBody>
+          <a:bodyPr wrap="square" rtlCol="0" anchor="ctr"/>
+          <a:lstStyle/>
+          <a:p>
+            <a:pPr algn="r" indent="0" marL="0">
+              <a:buNone/>
+            </a:pPr>
+            <a:r>
+              <a:rPr lang="en-US" sz="1000" dirty="0">
+                <a:solidFill>
+                  <a:srgbClr val="6B7280"/>
+                </a:solidFill>
+                <a:latin typeface="Calibri" pitchFamily="34" charset="0"/>
+                <a:ea typeface="Calibri" pitchFamily="34" charset="-122"/>
+                <a:cs typeface="Calibri" pitchFamily="34" charset="-120"/>
+              </a:rPr>
+              <a:t>9</a:t>
+            </a:r>
+            <a:endParaRPr lang="en-US" sz="1000" dirty="0"/>
           </a:p>
         </p:txBody>
       </p:sp>
